--- a/05_Linkedin_Posts/01_Latex.pptx
+++ b/05_Linkedin_Posts/01_Latex.pptx
@@ -6,7 +6,8 @@
   </p:sldMasterIdLst>
   <p:sldIdLst>
     <p:sldId id="259" r:id="rId2"/>
-    <p:sldId id="260" r:id="rId3"/>
+    <p:sldId id="261" r:id="rId3"/>
+    <p:sldId id="260" r:id="rId4"/>
   </p:sldIdLst>
   <p:sldSz cx="12192000" cy="6858000"/>
   <p:notesSz cx="6858000" cy="9144000"/>
@@ -262,7 +263,7 @@
           <a:p>
             <a:fld id="{9D4686FF-3DC0-4D03-9102-64E826D8EE6E}" type="datetimeFigureOut">
               <a:rPr lang="LID4096" smtClean="0"/>
-              <a:t>06/26/2026</a:t>
+              <a:t>06/30/2026</a:t>
             </a:fld>
             <a:endParaRPr lang="LID4096"/>
           </a:p>
@@ -462,7 +463,7 @@
           <a:p>
             <a:fld id="{9D4686FF-3DC0-4D03-9102-64E826D8EE6E}" type="datetimeFigureOut">
               <a:rPr lang="LID4096" smtClean="0"/>
-              <a:t>06/26/2026</a:t>
+              <a:t>06/30/2026</a:t>
             </a:fld>
             <a:endParaRPr lang="LID4096"/>
           </a:p>
@@ -672,7 +673,7 @@
           <a:p>
             <a:fld id="{9D4686FF-3DC0-4D03-9102-64E826D8EE6E}" type="datetimeFigureOut">
               <a:rPr lang="LID4096" smtClean="0"/>
-              <a:t>06/26/2026</a:t>
+              <a:t>06/30/2026</a:t>
             </a:fld>
             <a:endParaRPr lang="LID4096"/>
           </a:p>
@@ -872,7 +873,7 @@
           <a:p>
             <a:fld id="{9D4686FF-3DC0-4D03-9102-64E826D8EE6E}" type="datetimeFigureOut">
               <a:rPr lang="LID4096" smtClean="0"/>
-              <a:t>06/26/2026</a:t>
+              <a:t>06/30/2026</a:t>
             </a:fld>
             <a:endParaRPr lang="LID4096"/>
           </a:p>
@@ -1148,7 +1149,7 @@
           <a:p>
             <a:fld id="{9D4686FF-3DC0-4D03-9102-64E826D8EE6E}" type="datetimeFigureOut">
               <a:rPr lang="LID4096" smtClean="0"/>
-              <a:t>06/26/2026</a:t>
+              <a:t>06/30/2026</a:t>
             </a:fld>
             <a:endParaRPr lang="LID4096"/>
           </a:p>
@@ -1416,7 +1417,7 @@
           <a:p>
             <a:fld id="{9D4686FF-3DC0-4D03-9102-64E826D8EE6E}" type="datetimeFigureOut">
               <a:rPr lang="LID4096" smtClean="0"/>
-              <a:t>06/26/2026</a:t>
+              <a:t>06/30/2026</a:t>
             </a:fld>
             <a:endParaRPr lang="LID4096"/>
           </a:p>
@@ -1831,7 +1832,7 @@
           <a:p>
             <a:fld id="{9D4686FF-3DC0-4D03-9102-64E826D8EE6E}" type="datetimeFigureOut">
               <a:rPr lang="LID4096" smtClean="0"/>
-              <a:t>06/26/2026</a:t>
+              <a:t>06/30/2026</a:t>
             </a:fld>
             <a:endParaRPr lang="LID4096"/>
           </a:p>
@@ -1973,7 +1974,7 @@
           <a:p>
             <a:fld id="{9D4686FF-3DC0-4D03-9102-64E826D8EE6E}" type="datetimeFigureOut">
               <a:rPr lang="LID4096" smtClean="0"/>
-              <a:t>06/26/2026</a:t>
+              <a:t>06/30/2026</a:t>
             </a:fld>
             <a:endParaRPr lang="LID4096"/>
           </a:p>
@@ -2086,7 +2087,7 @@
           <a:p>
             <a:fld id="{9D4686FF-3DC0-4D03-9102-64E826D8EE6E}" type="datetimeFigureOut">
               <a:rPr lang="LID4096" smtClean="0"/>
-              <a:t>06/26/2026</a:t>
+              <a:t>06/30/2026</a:t>
             </a:fld>
             <a:endParaRPr lang="LID4096"/>
           </a:p>
@@ -2399,7 +2400,7 @@
           <a:p>
             <a:fld id="{9D4686FF-3DC0-4D03-9102-64E826D8EE6E}" type="datetimeFigureOut">
               <a:rPr lang="LID4096" smtClean="0"/>
-              <a:t>06/26/2026</a:t>
+              <a:t>06/30/2026</a:t>
             </a:fld>
             <a:endParaRPr lang="LID4096"/>
           </a:p>
@@ -2688,7 +2689,7 @@
           <a:p>
             <a:fld id="{9D4686FF-3DC0-4D03-9102-64E826D8EE6E}" type="datetimeFigureOut">
               <a:rPr lang="LID4096" smtClean="0"/>
-              <a:t>06/26/2026</a:t>
+              <a:t>06/30/2026</a:t>
             </a:fld>
             <a:endParaRPr lang="LID4096"/>
           </a:p>
@@ -2931,7 +2932,7 @@
           <a:p>
             <a:fld id="{9D4686FF-3DC0-4D03-9102-64E826D8EE6E}" type="datetimeFigureOut">
               <a:rPr lang="LID4096" smtClean="0"/>
-              <a:t>06/26/2026</a:t>
+              <a:t>06/30/2026</a:t>
             </a:fld>
             <a:endParaRPr lang="LID4096"/>
           </a:p>
@@ -3348,134 +3349,12 @@
           <a:chExt cx="0" cy="0"/>
         </a:xfrm>
       </p:grpSpPr>
-      <p:sp>
-        <p:nvSpPr>
-          <p:cNvPr id="5" name="TextBox 4">
-            <a:extLst>
-              <a:ext uri="{FF2B5EF4-FFF2-40B4-BE49-F238E27FC236}">
-                <a16:creationId xmlns:a16="http://schemas.microsoft.com/office/drawing/2014/main" id="{AD2A08B1-A190-D003-C04B-6AD59CC8ECFB}"/>
-              </a:ext>
-            </a:extLst>
-          </p:cNvPr>
-          <p:cNvSpPr txBox="1"/>
-          <p:nvPr/>
-        </p:nvSpPr>
-        <p:spPr>
-          <a:xfrm>
-            <a:off x="1194324" y="4059828"/>
-            <a:ext cx="8683011" cy="2440259"/>
-          </a:xfrm>
-          <a:prstGeom prst="rect">
-            <a:avLst/>
-          </a:prstGeom>
-          <a:solidFill>
-            <a:schemeClr val="accent2">
-              <a:lumMod val="20000"/>
-              <a:lumOff val="80000"/>
-            </a:schemeClr>
-          </a:solidFill>
-          <a:ln>
-            <a:solidFill>
-              <a:schemeClr val="tx1"/>
-            </a:solidFill>
-          </a:ln>
-          <a:effectLst>
-            <a:outerShdw blurRad="50800" dist="38100" dir="8100000" algn="tr" rotWithShape="0">
-              <a:prstClr val="black">
-                <a:alpha val="40000"/>
-              </a:prstClr>
-            </a:outerShdw>
-          </a:effectLst>
-        </p:spPr>
-        <p:txBody>
-          <a:bodyPr wrap="square">
-            <a:noAutofit/>
-          </a:bodyPr>
-          <a:lstStyle/>
-          <a:p>
-            <a:pPr>
-              <a:lnSpc>
-                <a:spcPts val="1650"/>
-              </a:lnSpc>
-              <a:buNone/>
-            </a:pPr>
-            <a:endParaRPr lang="en-GB" sz="1700" b="1" u="sng" dirty="0">
-              <a:solidFill>
-                <a:srgbClr val="FF0000"/>
-              </a:solidFill>
-              <a:effectLst/>
-              <a:latin typeface="Consolas" panose="020B0609020204030204" pitchFamily="49" charset="0"/>
-            </a:endParaRPr>
-          </a:p>
-        </p:txBody>
-      </p:sp>
-      <p:sp>
-        <p:nvSpPr>
-          <p:cNvPr id="2" name="TextBox 1">
-            <a:extLst>
-              <a:ext uri="{FF2B5EF4-FFF2-40B4-BE49-F238E27FC236}">
-                <a16:creationId xmlns:a16="http://schemas.microsoft.com/office/drawing/2014/main" id="{B0FE93DD-92CF-7D0A-840D-BB3956AFD79B}"/>
-              </a:ext>
-            </a:extLst>
-          </p:cNvPr>
-          <p:cNvSpPr txBox="1"/>
-          <p:nvPr/>
-        </p:nvSpPr>
-        <p:spPr>
-          <a:xfrm>
-            <a:off x="5385587" y="605688"/>
-            <a:ext cx="4491748" cy="2440259"/>
-          </a:xfrm>
-          <a:prstGeom prst="rect">
-            <a:avLst/>
-          </a:prstGeom>
-          <a:solidFill>
-            <a:schemeClr val="accent2">
-              <a:lumMod val="20000"/>
-              <a:lumOff val="80000"/>
-            </a:schemeClr>
-          </a:solidFill>
-          <a:ln>
-            <a:solidFill>
-              <a:schemeClr val="tx1"/>
-            </a:solidFill>
-          </a:ln>
-          <a:effectLst>
-            <a:outerShdw blurRad="50800" dist="38100" dir="8100000" algn="tr" rotWithShape="0">
-              <a:prstClr val="black">
-                <a:alpha val="40000"/>
-              </a:prstClr>
-            </a:outerShdw>
-          </a:effectLst>
-        </p:spPr>
-        <p:txBody>
-          <a:bodyPr wrap="square">
-            <a:noAutofit/>
-          </a:bodyPr>
-          <a:lstStyle/>
-          <a:p>
-            <a:pPr>
-              <a:lnSpc>
-                <a:spcPts val="1650"/>
-              </a:lnSpc>
-              <a:buNone/>
-            </a:pPr>
-            <a:endParaRPr lang="en-GB" sz="1700" b="1" u="sng" dirty="0">
-              <a:solidFill>
-                <a:srgbClr val="FF0000"/>
-              </a:solidFill>
-              <a:effectLst/>
-              <a:latin typeface="Consolas" panose="020B0609020204030204" pitchFamily="49" charset="0"/>
-            </a:endParaRPr>
-          </a:p>
-        </p:txBody>
-      </p:sp>
       <p:grpSp>
         <p:nvGrpSpPr>
-          <p:cNvPr id="10" name="Group 9">
-            <a:extLst>
-              <a:ext uri="{FF2B5EF4-FFF2-40B4-BE49-F238E27FC236}">
-                <a16:creationId xmlns:a16="http://schemas.microsoft.com/office/drawing/2014/main" id="{BF5732ED-22FF-0A9C-4B67-CAD17C37947C}"/>
+          <p:cNvPr id="16" name="Group 15">
+            <a:extLst>
+              <a:ext uri="{FF2B5EF4-FFF2-40B4-BE49-F238E27FC236}">
+                <a16:creationId xmlns:a16="http://schemas.microsoft.com/office/drawing/2014/main" id="{B6E5A675-C85A-A925-DFCB-43D541FECBAD}"/>
               </a:ext>
             </a:extLst>
           </p:cNvPr>
@@ -3484,102 +3363,18 @@
         </p:nvGrpSpPr>
         <p:grpSpPr>
           <a:xfrm>
-            <a:off x="1194324" y="607022"/>
-            <a:ext cx="8773542" cy="2438925"/>
-            <a:chOff x="415726" y="398794"/>
-            <a:chExt cx="8773542" cy="2438925"/>
+            <a:off x="1709229" y="415565"/>
+            <a:ext cx="8773542" cy="5894399"/>
+            <a:chOff x="1194324" y="605688"/>
+            <a:chExt cx="8773542" cy="5894399"/>
           </a:xfrm>
         </p:grpSpPr>
-        <p:pic>
-          <p:nvPicPr>
-            <p:cNvPr id="7" name="Picture 6">
+        <p:sp>
+          <p:nvSpPr>
+            <p:cNvPr id="5" name="TextBox 4">
               <a:extLst>
                 <a:ext uri="{FF2B5EF4-FFF2-40B4-BE49-F238E27FC236}">
-                  <a16:creationId xmlns:a16="http://schemas.microsoft.com/office/drawing/2014/main" id="{AE74B8B4-CD56-EB47-F8F7-FF9BAB8BE169}"/>
-                </a:ext>
-              </a:extLst>
-            </p:cNvPr>
-            <p:cNvPicPr>
-              <a:picLocks noChangeAspect="1"/>
-            </p:cNvPicPr>
-            <p:nvPr/>
-          </p:nvPicPr>
-          <p:blipFill>
-            <a:blip r:embed="rId2"/>
-            <a:stretch>
-              <a:fillRect/>
-            </a:stretch>
-          </p:blipFill>
-          <p:spPr>
-            <a:xfrm>
-              <a:off x="415726" y="1301326"/>
-              <a:ext cx="1417376" cy="1536393"/>
-            </a:xfrm>
-            <a:prstGeom prst="rect">
-              <a:avLst/>
-            </a:prstGeom>
-            <a:ln>
-              <a:solidFill>
-                <a:schemeClr val="tx1"/>
-              </a:solidFill>
-            </a:ln>
-            <a:effectLst>
-              <a:outerShdw blurRad="50800" dist="38100" dir="8100000" algn="tr" rotWithShape="0">
-                <a:prstClr val="black">
-                  <a:alpha val="40000"/>
-                </a:prstClr>
-              </a:outerShdw>
-            </a:effectLst>
-          </p:spPr>
-        </p:pic>
-        <p:pic>
-          <p:nvPicPr>
-            <p:cNvPr id="9" name="Picture 8">
-              <a:extLst>
-                <a:ext uri="{FF2B5EF4-FFF2-40B4-BE49-F238E27FC236}">
-                  <a16:creationId xmlns:a16="http://schemas.microsoft.com/office/drawing/2014/main" id="{04348C19-D0A1-ABB3-7419-E5055972BF54}"/>
-                </a:ext>
-              </a:extLst>
-            </p:cNvPr>
-            <p:cNvPicPr>
-              <a:picLocks noChangeAspect="1"/>
-            </p:cNvPicPr>
-            <p:nvPr/>
-          </p:nvPicPr>
-          <p:blipFill>
-            <a:blip r:embed="rId3"/>
-            <a:stretch>
-              <a:fillRect/>
-            </a:stretch>
-          </p:blipFill>
-          <p:spPr>
-            <a:xfrm>
-              <a:off x="1925979" y="1301327"/>
-              <a:ext cx="2533045" cy="1536392"/>
-            </a:xfrm>
-            <a:prstGeom prst="rect">
-              <a:avLst/>
-            </a:prstGeom>
-            <a:ln>
-              <a:solidFill>
-                <a:schemeClr val="tx1"/>
-              </a:solidFill>
-            </a:ln>
-            <a:effectLst>
-              <a:outerShdw blurRad="50800" dist="38100" dir="8100000" algn="tr" rotWithShape="0">
-                <a:prstClr val="black">
-                  <a:alpha val="40000"/>
-                </a:prstClr>
-              </a:outerShdw>
-            </a:effectLst>
-          </p:spPr>
-        </p:pic>
-        <p:sp>
-          <p:nvSpPr>
-            <p:cNvPr id="13" name="TextBox 12">
-              <a:extLst>
-                <a:ext uri="{FF2B5EF4-FFF2-40B4-BE49-F238E27FC236}">
-                  <a16:creationId xmlns:a16="http://schemas.microsoft.com/office/drawing/2014/main" id="{BF93DBFC-DC5A-999D-DADD-BFFF66AC3D48}"/>
+                  <a16:creationId xmlns:a16="http://schemas.microsoft.com/office/drawing/2014/main" id="{AD2A08B1-A190-D003-C04B-6AD59CC8ECFB}"/>
                 </a:ext>
               </a:extLst>
             </p:cNvPr>
@@ -3588,201 +3383,8 @@
           </p:nvSpPr>
           <p:spPr>
             <a:xfrm>
-              <a:off x="4708723" y="1301326"/>
-              <a:ext cx="4480545" cy="1536393"/>
-            </a:xfrm>
-            <a:prstGeom prst="rect">
-              <a:avLst/>
-            </a:prstGeom>
-            <a:noFill/>
-          </p:spPr>
-          <p:txBody>
-            <a:bodyPr wrap="square" lIns="0" tIns="0" rIns="0" bIns="0" anchor="ctr" anchorCtr="0">
-              <a:noAutofit/>
-            </a:bodyPr>
-            <a:lstStyle/>
-            <a:p>
-              <a:r>
-                <a:rPr lang="en-US" sz="2400" b="1" dirty="0">
-                  <a:effectLst>
-                    <a:outerShdw blurRad="38100" dist="38100" dir="2700000" algn="tl">
-                      <a:srgbClr val="000000">
-                        <a:alpha val="43137"/>
-                      </a:srgbClr>
-                    </a:outerShdw>
-                  </a:effectLst>
-                  <a:latin typeface="Horley Old Style"/>
-                </a:rPr>
-                <a:t>PIL </a:t>
-              </a:r>
-              <a:r>
-                <a:rPr lang="en-US" sz="2400" b="1" dirty="0">
-                  <a:solidFill>
-                    <a:srgbClr val="FF0000"/>
-                  </a:solidFill>
-                  <a:effectLst>
-                    <a:outerShdw blurRad="38100" dist="38100" dir="2700000" algn="tl">
-                      <a:srgbClr val="000000">
-                        <a:alpha val="43137"/>
-                      </a:srgbClr>
-                    </a:outerShdw>
-                  </a:effectLst>
-                  <a:latin typeface="Horley Old Style"/>
-                </a:rPr>
-                <a:t>Path</a:t>
-              </a:r>
-              <a:r>
-                <a:rPr lang="en-US" sz="2000" dirty="0">
-                  <a:latin typeface="Horley Old Style"/>
-                </a:rPr>
-                <a:t> - </a:t>
-              </a:r>
-              <a:r>
-                <a:rPr lang="pt-PT" sz="2000" dirty="0">
-                  <a:latin typeface="Horley Old Style"/>
-                </a:rPr>
-                <a:t>Biblioteca de imagens Python</a:t>
-              </a:r>
-            </a:p>
-            <a:p>
-              <a:r>
-                <a:rPr lang="en-GB" sz="2400" b="1" dirty="0">
-                  <a:solidFill>
-                    <a:srgbClr val="24292E"/>
-                  </a:solidFill>
-                  <a:effectLst>
-                    <a:outerShdw blurRad="38100" dist="38100" dir="2700000" algn="tl">
-                      <a:srgbClr val="000000">
-                        <a:alpha val="43137"/>
-                      </a:srgbClr>
-                    </a:outerShdw>
-                  </a:effectLst>
-                  <a:latin typeface="Horley Old Style"/>
-                </a:rPr>
-                <a:t>Latex</a:t>
-              </a:r>
-              <a:r>
-                <a:rPr lang="en-GB" sz="2400" b="1" dirty="0">
-                  <a:solidFill>
-                    <a:srgbClr val="FF0000"/>
-                  </a:solidFill>
-                  <a:effectLst>
-                    <a:outerShdw blurRad="38100" dist="38100" dir="2700000" algn="tl">
-                      <a:srgbClr val="000000">
-                        <a:alpha val="43137"/>
-                      </a:srgbClr>
-                    </a:outerShdw>
-                  </a:effectLst>
-                  <a:latin typeface="Horley Old Style"/>
-                </a:rPr>
-                <a:t>OCR</a:t>
-              </a:r>
-              <a:r>
-                <a:rPr lang="en-US" sz="2000" b="1" dirty="0">
-                  <a:effectLst>
-                    <a:outerShdw blurRad="38100" dist="38100" dir="2700000" algn="tl">
-                      <a:srgbClr val="000000">
-                        <a:alpha val="43137"/>
-                      </a:srgbClr>
-                    </a:outerShdw>
-                  </a:effectLst>
-                  <a:latin typeface="Horley Old Style"/>
-                </a:rPr>
-                <a:t> </a:t>
-              </a:r>
-              <a:r>
-                <a:rPr lang="en-US" sz="2000" dirty="0">
-                  <a:latin typeface="Horley Old Style"/>
-                </a:rPr>
-                <a:t>- </a:t>
-              </a:r>
-              <a:r>
-                <a:rPr lang="pt-BR" sz="2000" b="1" u="sng" dirty="0">
-                  <a:latin typeface="Horley Old Style"/>
-                </a:rPr>
-                <a:t>Reconhecedor d caracteres </a:t>
-              </a:r>
-              <a:r>
-                <a:rPr lang="pt-BR" sz="2200" b="1" u="sng" dirty="0">
-                  <a:latin typeface="Horley Old Style"/>
-                </a:rPr>
-                <a:t> </a:t>
-              </a:r>
-            </a:p>
-            <a:p>
-              <a:endParaRPr lang="pt-BR" sz="600" u="sng" dirty="0">
-                <a:latin typeface="Horley Old Style"/>
-              </a:endParaRPr>
-            </a:p>
-            <a:p>
-              <a:pPr marL="342900" indent="-342900">
-                <a:buFontTx/>
-                <a:buChar char="-"/>
-              </a:pPr>
-              <a:r>
-                <a:rPr lang="pt-BR" sz="2000" b="1" dirty="0">
-                  <a:solidFill>
-                    <a:srgbClr val="FF0000"/>
-                  </a:solidFill>
-                  <a:latin typeface="Horley Old Style"/>
-                </a:rPr>
-                <a:t>Converte</a:t>
-              </a:r>
-              <a:r>
-                <a:rPr lang="pt-BR" sz="2000" b="1" dirty="0">
-                  <a:latin typeface="Horley Old Style"/>
-                </a:rPr>
-                <a:t> </a:t>
-              </a:r>
-              <a:r>
-                <a:rPr lang="pt-BR" sz="2000" b="1" dirty="0">
-                  <a:solidFill>
-                    <a:srgbClr val="FF0000"/>
-                  </a:solidFill>
-                  <a:latin typeface="Horley Old Style"/>
-                </a:rPr>
-                <a:t>imagens</a:t>
-              </a:r>
-              <a:r>
-                <a:rPr lang="pt-BR" sz="2000" dirty="0">
-                  <a:latin typeface="Horley Old Style"/>
-                </a:rPr>
-                <a:t>, documentos (PDF) digitalizados e fotos </a:t>
-              </a:r>
-              <a:r>
-                <a:rPr lang="pt-BR" sz="2000" b="1" dirty="0">
-                  <a:solidFill>
-                    <a:srgbClr val="FF0000"/>
-                  </a:solidFill>
-                  <a:latin typeface="Horley Old Style"/>
-                </a:rPr>
-                <a:t>... em texto</a:t>
-              </a:r>
-              <a:endParaRPr lang="en-US" sz="2000" b="1" dirty="0">
-                <a:solidFill>
-                  <a:srgbClr val="FF0000"/>
-                </a:solidFill>
-                <a:latin typeface="Horley Old Style"/>
-              </a:endParaRPr>
-            </a:p>
-          </p:txBody>
-        </p:sp>
-        <p:sp>
-          <p:nvSpPr>
-            <p:cNvPr id="4" name="TextBox 3">
-              <a:extLst>
-                <a:ext uri="{FF2B5EF4-FFF2-40B4-BE49-F238E27FC236}">
-                  <a16:creationId xmlns:a16="http://schemas.microsoft.com/office/drawing/2014/main" id="{EE5D6E43-6BD3-89FC-1AAB-E8626A86A321}"/>
-                </a:ext>
-              </a:extLst>
-            </p:cNvPr>
-            <p:cNvSpPr txBox="1"/>
-            <p:nvPr/>
-          </p:nvSpPr>
-          <p:spPr>
-            <a:xfrm>
-              <a:off x="415727" y="398794"/>
-              <a:ext cx="4047631" cy="790791"/>
+              <a:off x="1194324" y="4059828"/>
+              <a:ext cx="8683011" cy="2440259"/>
             </a:xfrm>
             <a:prstGeom prst="rect">
               <a:avLst/>
@@ -3818,229 +3420,22 @@
                 </a:lnSpc>
                 <a:buNone/>
               </a:pPr>
-              <a:r>
-                <a:rPr lang="en-GB" sz="1700" b="0" dirty="0">
-                  <a:solidFill>
-                    <a:srgbClr val="D73A49"/>
-                  </a:solidFill>
-                  <a:effectLst/>
-                  <a:latin typeface="Consolas" panose="020B0609020204030204" pitchFamily="49" charset="0"/>
-                </a:rPr>
-                <a:t>from</a:t>
-              </a:r>
-              <a:r>
-                <a:rPr lang="en-GB" sz="1700" b="0" dirty="0">
-                  <a:solidFill>
-                    <a:srgbClr val="24292E"/>
-                  </a:solidFill>
-                  <a:effectLst/>
-                  <a:latin typeface="Consolas" panose="020B0609020204030204" pitchFamily="49" charset="0"/>
-                </a:rPr>
-                <a:t> </a:t>
-              </a:r>
-              <a:r>
-                <a:rPr lang="en-GB" sz="1700" b="1" dirty="0">
-                  <a:solidFill>
-                    <a:srgbClr val="24292E"/>
-                  </a:solidFill>
-                  <a:effectLst>
-                    <a:outerShdw blurRad="38100" dist="38100" dir="2700000" algn="tl">
-                      <a:srgbClr val="000000">
-                        <a:alpha val="43137"/>
-                      </a:srgbClr>
-                    </a:outerShdw>
-                  </a:effectLst>
-                  <a:latin typeface="Consolas" panose="020B0609020204030204" pitchFamily="49" charset="0"/>
-                </a:rPr>
-                <a:t>path</a:t>
-              </a:r>
-              <a:r>
-                <a:rPr lang="en-GB" sz="1700" b="0" dirty="0">
-                  <a:solidFill>
-                    <a:srgbClr val="24292E"/>
-                  </a:solidFill>
-                  <a:effectLst/>
-                  <a:latin typeface="Consolas" panose="020B0609020204030204" pitchFamily="49" charset="0"/>
-                </a:rPr>
-                <a:t>lib import </a:t>
-              </a:r>
-              <a:r>
-                <a:rPr lang="en-GB" sz="1700" b="1" dirty="0">
-                  <a:solidFill>
-                    <a:srgbClr val="FF0000"/>
-                  </a:solidFill>
-                  <a:effectLst/>
-                  <a:latin typeface="Consolas" panose="020B0609020204030204" pitchFamily="49" charset="0"/>
-                </a:rPr>
-                <a:t>Path </a:t>
-              </a:r>
-            </a:p>
-            <a:p>
-              <a:pPr>
-                <a:lnSpc>
-                  <a:spcPts val="1650"/>
-                </a:lnSpc>
-                <a:buNone/>
-              </a:pPr>
-              <a:r>
-                <a:rPr lang="en-GB" sz="1700" b="0" dirty="0">
-                  <a:solidFill>
-                    <a:srgbClr val="D73A49"/>
-                  </a:solidFill>
-                  <a:effectLst/>
-                  <a:latin typeface="Consolas" panose="020B0609020204030204" pitchFamily="49" charset="0"/>
-                </a:rPr>
-                <a:t>from</a:t>
-              </a:r>
-              <a:r>
-                <a:rPr lang="en-GB" sz="1700" b="0" dirty="0">
-                  <a:solidFill>
-                    <a:srgbClr val="24292E"/>
-                  </a:solidFill>
-                  <a:effectLst/>
-                  <a:latin typeface="Consolas" panose="020B0609020204030204" pitchFamily="49" charset="0"/>
-                </a:rPr>
-                <a:t> </a:t>
-              </a:r>
-              <a:r>
-                <a:rPr lang="en-GB" sz="1700" b="1" dirty="0">
-                  <a:solidFill>
-                    <a:srgbClr val="24292E"/>
-                  </a:solidFill>
-                  <a:effectLst>
-                    <a:outerShdw blurRad="38100" dist="38100" dir="2700000" algn="tl">
-                      <a:srgbClr val="000000">
-                        <a:alpha val="43137"/>
-                      </a:srgbClr>
-                    </a:outerShdw>
-                  </a:effectLst>
-                  <a:latin typeface="Consolas" panose="020B0609020204030204" pitchFamily="49" charset="0"/>
-                </a:rPr>
-                <a:t>PIL</a:t>
-              </a:r>
-              <a:r>
-                <a:rPr lang="en-GB" sz="1700" b="0" dirty="0">
-                  <a:solidFill>
-                    <a:srgbClr val="24292E"/>
-                  </a:solidFill>
-                  <a:effectLst/>
-                  <a:latin typeface="Consolas" panose="020B0609020204030204" pitchFamily="49" charset="0"/>
-                </a:rPr>
-                <a:t> import </a:t>
-              </a:r>
-              <a:r>
-                <a:rPr lang="en-GB" sz="1700" b="1" dirty="0">
-                  <a:solidFill>
-                    <a:srgbClr val="FF0000"/>
-                  </a:solidFill>
-                  <a:effectLst/>
-                  <a:latin typeface="Consolas" panose="020B0609020204030204" pitchFamily="49" charset="0"/>
-                </a:rPr>
-                <a:t>Image </a:t>
-              </a:r>
-            </a:p>
-            <a:p>
-              <a:pPr>
-                <a:lnSpc>
-                  <a:spcPts val="1650"/>
-                </a:lnSpc>
-                <a:buNone/>
-              </a:pPr>
-              <a:r>
-                <a:rPr lang="en-GB" sz="1700" b="0" dirty="0">
-                  <a:solidFill>
-                    <a:srgbClr val="D73A49"/>
-                  </a:solidFill>
-                  <a:effectLst/>
-                  <a:latin typeface="Consolas" panose="020B0609020204030204" pitchFamily="49" charset="0"/>
-                </a:rPr>
-                <a:t>from</a:t>
-              </a:r>
-              <a:r>
-                <a:rPr lang="en-GB" sz="1700" b="0" dirty="0">
-                  <a:solidFill>
-                    <a:srgbClr val="24292E"/>
-                  </a:solidFill>
-                  <a:effectLst/>
-                  <a:latin typeface="Consolas" panose="020B0609020204030204" pitchFamily="49" charset="0"/>
-                </a:rPr>
-                <a:t> </a:t>
-              </a:r>
-              <a:r>
-                <a:rPr lang="en-GB" sz="1700" b="0" dirty="0">
-                  <a:solidFill>
-                    <a:srgbClr val="005CC5"/>
-                  </a:solidFill>
-                  <a:effectLst/>
-                  <a:latin typeface="Consolas" panose="020B0609020204030204" pitchFamily="49" charset="0"/>
-                </a:rPr>
-                <a:t>pix2tex</a:t>
-              </a:r>
-              <a:r>
-                <a:rPr lang="en-GB" sz="1700" b="0" dirty="0">
-                  <a:solidFill>
-                    <a:srgbClr val="24292E"/>
-                  </a:solidFill>
-                  <a:effectLst/>
-                  <a:latin typeface="Consolas" panose="020B0609020204030204" pitchFamily="49" charset="0"/>
-                </a:rPr>
-                <a:t>.</a:t>
-              </a:r>
-              <a:r>
-                <a:rPr lang="en-GB" sz="1700" b="0" dirty="0">
-                  <a:solidFill>
-                    <a:srgbClr val="005CC5"/>
-                  </a:solidFill>
-                  <a:effectLst/>
-                  <a:latin typeface="Consolas" panose="020B0609020204030204" pitchFamily="49" charset="0"/>
-                </a:rPr>
-                <a:t>cli</a:t>
-              </a:r>
-              <a:r>
-                <a:rPr lang="en-GB" sz="1700" b="0" dirty="0">
-                  <a:solidFill>
-                    <a:srgbClr val="24292E"/>
-                  </a:solidFill>
-                  <a:effectLst/>
-                  <a:latin typeface="Consolas" panose="020B0609020204030204" pitchFamily="49" charset="0"/>
-                </a:rPr>
-                <a:t> import </a:t>
-              </a:r>
-              <a:r>
-                <a:rPr lang="en-GB" sz="1700" b="1" dirty="0">
-                  <a:solidFill>
-                    <a:srgbClr val="24292E"/>
-                  </a:solidFill>
-                  <a:effectLst>
-                    <a:outerShdw blurRad="38100" dist="38100" dir="2700000" algn="tl">
-                      <a:srgbClr val="000000">
-                        <a:alpha val="43137"/>
-                      </a:srgbClr>
-                    </a:outerShdw>
-                  </a:effectLst>
-                  <a:latin typeface="Consolas" panose="020B0609020204030204" pitchFamily="49" charset="0"/>
-                </a:rPr>
-                <a:t>Latex</a:t>
-              </a:r>
-              <a:r>
-                <a:rPr lang="en-GB" sz="1700" b="1" u="sng" dirty="0">
-                  <a:solidFill>
-                    <a:srgbClr val="FF0000"/>
-                  </a:solidFill>
-                  <a:effectLst/>
-                  <a:latin typeface="Consolas" panose="020B0609020204030204" pitchFamily="49" charset="0"/>
-                </a:rPr>
-                <a:t>OCR</a:t>
-              </a:r>
+              <a:endParaRPr lang="en-GB" sz="1700" b="1" u="sng" dirty="0">
+                <a:solidFill>
+                  <a:srgbClr val="FF0000"/>
+                </a:solidFill>
+                <a:effectLst/>
+                <a:latin typeface="Consolas" panose="020B0609020204030204" pitchFamily="49" charset="0"/>
+              </a:endParaRPr>
             </a:p>
           </p:txBody>
         </p:sp>
         <p:sp>
           <p:nvSpPr>
-            <p:cNvPr id="8" name="TextBox 7">
+            <p:cNvPr id="2" name="TextBox 1">
               <a:extLst>
                 <a:ext uri="{FF2B5EF4-FFF2-40B4-BE49-F238E27FC236}">
-                  <a16:creationId xmlns:a16="http://schemas.microsoft.com/office/drawing/2014/main" id="{0DF48F6B-202D-804C-DD1A-BF2B87077026}"/>
+                  <a16:creationId xmlns:a16="http://schemas.microsoft.com/office/drawing/2014/main" id="{B0FE93DD-92CF-7D0A-840D-BB3956AFD79B}"/>
                 </a:ext>
               </a:extLst>
             </p:cNvPr>
@@ -4049,103 +3444,59 @@
           </p:nvSpPr>
           <p:spPr>
             <a:xfrm>
-              <a:off x="4715533" y="493064"/>
-              <a:ext cx="4383199" cy="616235"/>
+              <a:off x="5385587" y="605688"/>
+              <a:ext cx="4491748" cy="2440259"/>
             </a:xfrm>
             <a:prstGeom prst="rect">
               <a:avLst/>
             </a:prstGeom>
-            <a:noFill/>
+            <a:solidFill>
+              <a:schemeClr val="accent2">
+                <a:lumMod val="20000"/>
+                <a:lumOff val="80000"/>
+              </a:schemeClr>
+            </a:solidFill>
+            <a:ln>
+              <a:solidFill>
+                <a:schemeClr val="tx1"/>
+              </a:solidFill>
+            </a:ln>
+            <a:effectLst>
+              <a:outerShdw blurRad="50800" dist="38100" dir="8100000" algn="tr" rotWithShape="0">
+                <a:prstClr val="black">
+                  <a:alpha val="40000"/>
+                </a:prstClr>
+              </a:outerShdw>
+            </a:effectLst>
           </p:spPr>
           <p:txBody>
-            <a:bodyPr wrap="square" lIns="0" tIns="0" rIns="0" bIns="0" anchor="ctr" anchorCtr="0">
+            <a:bodyPr wrap="square">
               <a:noAutofit/>
             </a:bodyPr>
             <a:lstStyle/>
             <a:p>
               <a:pPr>
+                <a:lnSpc>
+                  <a:spcPts val="1650"/>
+                </a:lnSpc>
                 <a:buNone/>
               </a:pPr>
-              <a:r>
-                <a:rPr lang="pt-BR" sz="2400" b="1" noProof="0" dirty="0">
-                  <a:effectLst>
-                    <a:outerShdw blurRad="38100" dist="38100" dir="2700000" algn="tl">
-                      <a:srgbClr val="000000">
-                        <a:alpha val="43137"/>
-                      </a:srgbClr>
-                    </a:outerShdw>
-                  </a:effectLst>
-                  <a:latin typeface="Horley Old Style"/>
-                </a:rPr>
-                <a:t>Path</a:t>
-              </a:r>
-              <a:r>
-                <a:rPr lang="pt-BR" sz="2400" b="1" noProof="0" dirty="0">
-                  <a:solidFill>
-                    <a:srgbClr val="FF0000"/>
-                  </a:solidFill>
-                  <a:effectLst>
-                    <a:outerShdw blurRad="38100" dist="38100" dir="2700000" algn="tl">
-                      <a:srgbClr val="000000">
-                        <a:alpha val="43137"/>
-                      </a:srgbClr>
-                    </a:outerShdw>
-                  </a:effectLst>
-                  <a:latin typeface="Horley Old Style"/>
-                </a:rPr>
-                <a:t>lib</a:t>
-              </a:r>
-              <a:r>
-                <a:rPr lang="pt-BR" sz="2400" noProof="0" dirty="0">
-                  <a:latin typeface="Horley Old Style"/>
-                </a:rPr>
-                <a:t>  - Caminhos  </a:t>
-              </a:r>
-            </a:p>
-            <a:p>
-              <a:pPr>
-                <a:buNone/>
-              </a:pPr>
-              <a:r>
-                <a:rPr lang="pt-BR" sz="2400" noProof="0" dirty="0"/>
-                <a:t>            sistema orientado a objetos</a:t>
-              </a:r>
-              <a:endParaRPr lang="pt-BR" sz="2400" b="1" u="sng" noProof="0" dirty="0">
+              <a:endParaRPr lang="en-GB" sz="1700" b="1" u="sng" dirty="0">
                 <a:solidFill>
                   <a:srgbClr val="FF0000"/>
                 </a:solidFill>
-                <a:latin typeface="Horley Old Style"/>
+                <a:effectLst/>
+                <a:latin typeface="Consolas" panose="020B0609020204030204" pitchFamily="49" charset="0"/>
               </a:endParaRPr>
             </a:p>
           </p:txBody>
         </p:sp>
-      </p:grpSp>
-      <p:grpSp>
-        <p:nvGrpSpPr>
-          <p:cNvPr id="38" name="Group 37">
-            <a:extLst>
-              <a:ext uri="{FF2B5EF4-FFF2-40B4-BE49-F238E27FC236}">
-                <a16:creationId xmlns:a16="http://schemas.microsoft.com/office/drawing/2014/main" id="{692C0CAD-0539-F470-8BE1-EC28143391AC}"/>
-              </a:ext>
-            </a:extLst>
-          </p:cNvPr>
-          <p:cNvGrpSpPr/>
-          <p:nvPr/>
-        </p:nvGrpSpPr>
-        <p:grpSpPr>
-          <a:xfrm>
-            <a:off x="1327531" y="4158348"/>
-            <a:ext cx="8416059" cy="2222446"/>
-            <a:chOff x="1026424" y="4269235"/>
-            <a:chExt cx="8416059" cy="2222446"/>
-          </a:xfrm>
-        </p:grpSpPr>
         <p:grpSp>
           <p:nvGrpSpPr>
-            <p:cNvPr id="12" name="Group 11">
+            <p:cNvPr id="10" name="Group 9">
               <a:extLst>
                 <a:ext uri="{FF2B5EF4-FFF2-40B4-BE49-F238E27FC236}">
-                  <a16:creationId xmlns:a16="http://schemas.microsoft.com/office/drawing/2014/main" id="{161F6DEA-096C-F555-48BB-1E739BC6EBAB}"/>
+                  <a16:creationId xmlns:a16="http://schemas.microsoft.com/office/drawing/2014/main" id="{BF5732ED-22FF-0A9C-4B67-CAD17C37947C}"/>
                 </a:ext>
               </a:extLst>
             </p:cNvPr>
@@ -4154,18 +3505,102 @@
           </p:nvGrpSpPr>
           <p:grpSpPr>
             <a:xfrm>
-              <a:off x="1026424" y="4269235"/>
-              <a:ext cx="8416059" cy="2222446"/>
-              <a:chOff x="1309228" y="3959086"/>
-              <a:chExt cx="8416059" cy="2222446"/>
+              <a:off x="1194324" y="607022"/>
+              <a:ext cx="8773542" cy="2438925"/>
+              <a:chOff x="415726" y="398794"/>
+              <a:chExt cx="8773542" cy="2438925"/>
             </a:xfrm>
           </p:grpSpPr>
+          <p:pic>
+            <p:nvPicPr>
+              <p:cNvPr id="7" name="Picture 6">
+                <a:extLst>
+                  <a:ext uri="{FF2B5EF4-FFF2-40B4-BE49-F238E27FC236}">
+                    <a16:creationId xmlns:a16="http://schemas.microsoft.com/office/drawing/2014/main" id="{AE74B8B4-CD56-EB47-F8F7-FF9BAB8BE169}"/>
+                  </a:ext>
+                </a:extLst>
+              </p:cNvPr>
+              <p:cNvPicPr>
+                <a:picLocks noChangeAspect="1"/>
+              </p:cNvPicPr>
+              <p:nvPr/>
+            </p:nvPicPr>
+            <p:blipFill>
+              <a:blip r:embed="rId2"/>
+              <a:stretch>
+                <a:fillRect/>
+              </a:stretch>
+            </p:blipFill>
+            <p:spPr>
+              <a:xfrm>
+                <a:off x="415726" y="1301326"/>
+                <a:ext cx="1417376" cy="1536393"/>
+              </a:xfrm>
+              <a:prstGeom prst="rect">
+                <a:avLst/>
+              </a:prstGeom>
+              <a:ln>
+                <a:solidFill>
+                  <a:schemeClr val="tx1"/>
+                </a:solidFill>
+              </a:ln>
+              <a:effectLst>
+                <a:outerShdw blurRad="50800" dist="38100" dir="8100000" algn="tr" rotWithShape="0">
+                  <a:prstClr val="black">
+                    <a:alpha val="40000"/>
+                  </a:prstClr>
+                </a:outerShdw>
+              </a:effectLst>
+            </p:spPr>
+          </p:pic>
+          <p:pic>
+            <p:nvPicPr>
+              <p:cNvPr id="9" name="Picture 8">
+                <a:extLst>
+                  <a:ext uri="{FF2B5EF4-FFF2-40B4-BE49-F238E27FC236}">
+                    <a16:creationId xmlns:a16="http://schemas.microsoft.com/office/drawing/2014/main" id="{04348C19-D0A1-ABB3-7419-E5055972BF54}"/>
+                  </a:ext>
+                </a:extLst>
+              </p:cNvPr>
+              <p:cNvPicPr>
+                <a:picLocks noChangeAspect="1"/>
+              </p:cNvPicPr>
+              <p:nvPr/>
+            </p:nvPicPr>
+            <p:blipFill>
+              <a:blip r:embed="rId3"/>
+              <a:stretch>
+                <a:fillRect/>
+              </a:stretch>
+            </p:blipFill>
+            <p:spPr>
+              <a:xfrm>
+                <a:off x="1925979" y="1301327"/>
+                <a:ext cx="2533045" cy="1536392"/>
+              </a:xfrm>
+              <a:prstGeom prst="rect">
+                <a:avLst/>
+              </a:prstGeom>
+              <a:ln>
+                <a:solidFill>
+                  <a:schemeClr val="tx1"/>
+                </a:solidFill>
+              </a:ln>
+              <a:effectLst>
+                <a:outerShdw blurRad="50800" dist="38100" dir="8100000" algn="tr" rotWithShape="0">
+                  <a:prstClr val="black">
+                    <a:alpha val="40000"/>
+                  </a:prstClr>
+                </a:outerShdw>
+              </a:effectLst>
+            </p:spPr>
+          </p:pic>
           <p:sp>
             <p:nvSpPr>
-              <p:cNvPr id="19" name="TextBox 18">
+              <p:cNvPr id="13" name="TextBox 12">
                 <a:extLst>
                   <a:ext uri="{FF2B5EF4-FFF2-40B4-BE49-F238E27FC236}">
-                    <a16:creationId xmlns:a16="http://schemas.microsoft.com/office/drawing/2014/main" id="{C293EDE8-16DF-FE06-8E36-C4C5AF57730B}"/>
+                    <a16:creationId xmlns:a16="http://schemas.microsoft.com/office/drawing/2014/main" id="{BF93DBFC-DC5A-999D-DADD-BFFF66AC3D48}"/>
                   </a:ext>
                 </a:extLst>
               </p:cNvPr>
@@ -4174,8 +3609,1309 @@
             </p:nvSpPr>
             <p:spPr>
               <a:xfrm>
-                <a:off x="4939491" y="5109387"/>
-                <a:ext cx="1753921" cy="461665"/>
+                <a:off x="4708723" y="1219847"/>
+                <a:ext cx="4480545" cy="1536393"/>
+              </a:xfrm>
+              <a:prstGeom prst="rect">
+                <a:avLst/>
+              </a:prstGeom>
+              <a:noFill/>
+            </p:spPr>
+            <p:txBody>
+              <a:bodyPr wrap="square" lIns="0" tIns="0" rIns="0" bIns="0" anchor="ctr" anchorCtr="0">
+                <a:noAutofit/>
+              </a:bodyPr>
+              <a:lstStyle/>
+              <a:p>
+                <a:r>
+                  <a:rPr lang="en-US" sz="2400" b="1" dirty="0">
+                    <a:effectLst>
+                      <a:outerShdw blurRad="38100" dist="38100" dir="2700000" algn="tl">
+                        <a:srgbClr val="000000">
+                          <a:alpha val="43137"/>
+                        </a:srgbClr>
+                      </a:outerShdw>
+                    </a:effectLst>
+                    <a:latin typeface="Horley Old Style"/>
+                  </a:rPr>
+                  <a:t>PIL </a:t>
+                </a:r>
+                <a:r>
+                  <a:rPr lang="en-US" sz="2400" b="1" dirty="0">
+                    <a:solidFill>
+                      <a:srgbClr val="FF0000"/>
+                    </a:solidFill>
+                    <a:effectLst>
+                      <a:outerShdw blurRad="38100" dist="38100" dir="2700000" algn="tl">
+                        <a:srgbClr val="000000">
+                          <a:alpha val="43137"/>
+                        </a:srgbClr>
+                      </a:outerShdw>
+                    </a:effectLst>
+                    <a:latin typeface="Horley Old Style"/>
+                  </a:rPr>
+                  <a:t>Path</a:t>
+                </a:r>
+                <a:r>
+                  <a:rPr lang="en-US" sz="2000" dirty="0">
+                    <a:latin typeface="Horley Old Style"/>
+                  </a:rPr>
+                  <a:t> - </a:t>
+                </a:r>
+                <a:r>
+                  <a:rPr lang="pt-PT" sz="2000" dirty="0">
+                    <a:latin typeface="Horley Old Style"/>
+                  </a:rPr>
+                  <a:t>Biblioteca de imagens Python</a:t>
+                </a:r>
+              </a:p>
+              <a:p>
+                <a:endParaRPr lang="pt-PT" sz="700" dirty="0">
+                  <a:latin typeface="Horley Old Style"/>
+                </a:endParaRPr>
+              </a:p>
+              <a:p>
+                <a:r>
+                  <a:rPr lang="en-GB" sz="2400" b="1" dirty="0">
+                    <a:solidFill>
+                      <a:srgbClr val="24292E"/>
+                    </a:solidFill>
+                    <a:effectLst>
+                      <a:outerShdw blurRad="38100" dist="38100" dir="2700000" algn="tl">
+                        <a:srgbClr val="000000">
+                          <a:alpha val="43137"/>
+                        </a:srgbClr>
+                      </a:outerShdw>
+                    </a:effectLst>
+                    <a:latin typeface="Horley Old Style"/>
+                  </a:rPr>
+                  <a:t>Latex</a:t>
+                </a:r>
+                <a:r>
+                  <a:rPr lang="en-GB" sz="2400" b="1" dirty="0">
+                    <a:solidFill>
+                      <a:srgbClr val="FF0000"/>
+                    </a:solidFill>
+                    <a:effectLst>
+                      <a:outerShdw blurRad="38100" dist="38100" dir="2700000" algn="tl">
+                        <a:srgbClr val="000000">
+                          <a:alpha val="43137"/>
+                        </a:srgbClr>
+                      </a:outerShdw>
+                    </a:effectLst>
+                    <a:latin typeface="Horley Old Style"/>
+                  </a:rPr>
+                  <a:t>OCR</a:t>
+                </a:r>
+                <a:r>
+                  <a:rPr lang="en-US" sz="2000" b="1" dirty="0">
+                    <a:effectLst>
+                      <a:outerShdw blurRad="38100" dist="38100" dir="2700000" algn="tl">
+                        <a:srgbClr val="000000">
+                          <a:alpha val="43137"/>
+                        </a:srgbClr>
+                      </a:outerShdw>
+                    </a:effectLst>
+                    <a:latin typeface="Horley Old Style"/>
+                  </a:rPr>
+                  <a:t> </a:t>
+                </a:r>
+                <a:r>
+                  <a:rPr lang="pt-BR" sz="2000" b="1" u="sng" dirty="0">
+                    <a:latin typeface="Horley Old Style"/>
+                  </a:rPr>
+                  <a:t>Reconhecedor de caracteres </a:t>
+                </a:r>
+                <a:r>
+                  <a:rPr lang="pt-BR" sz="2200" b="1" u="sng" dirty="0">
+                    <a:latin typeface="Horley Old Style"/>
+                  </a:rPr>
+                  <a:t> </a:t>
+                </a:r>
+              </a:p>
+              <a:p>
+                <a:endParaRPr lang="pt-BR" sz="600" u="sng" dirty="0">
+                  <a:latin typeface="Horley Old Style"/>
+                </a:endParaRPr>
+              </a:p>
+              <a:p>
+                <a:pPr marL="342900" indent="-342900">
+                  <a:buFontTx/>
+                  <a:buChar char="-"/>
+                </a:pPr>
+                <a:r>
+                  <a:rPr lang="pt-BR" sz="2000" b="1" dirty="0">
+                    <a:solidFill>
+                      <a:srgbClr val="FF0000"/>
+                    </a:solidFill>
+                    <a:latin typeface="Horley Old Style"/>
+                  </a:rPr>
+                  <a:t>Converte</a:t>
+                </a:r>
+                <a:r>
+                  <a:rPr lang="pt-BR" sz="2000" b="1" dirty="0">
+                    <a:latin typeface="Horley Old Style"/>
+                  </a:rPr>
+                  <a:t> </a:t>
+                </a:r>
+                <a:r>
+                  <a:rPr lang="pt-BR" sz="2000" b="1" dirty="0">
+                    <a:solidFill>
+                      <a:srgbClr val="FF0000"/>
+                    </a:solidFill>
+                    <a:latin typeface="Horley Old Style"/>
+                  </a:rPr>
+                  <a:t>imagens</a:t>
+                </a:r>
+                <a:r>
+                  <a:rPr lang="pt-BR" sz="2000" dirty="0">
+                    <a:latin typeface="Horley Old Style"/>
+                  </a:rPr>
+                  <a:t>, documentos (PDF) digitalizados e fotos </a:t>
+                </a:r>
+                <a:r>
+                  <a:rPr lang="pt-BR" sz="2000" b="1" dirty="0">
+                    <a:solidFill>
+                      <a:srgbClr val="FF0000"/>
+                    </a:solidFill>
+                    <a:latin typeface="Horley Old Style"/>
+                  </a:rPr>
+                  <a:t>... em texto</a:t>
+                </a:r>
+                <a:endParaRPr lang="en-US" sz="2000" b="1" dirty="0">
+                  <a:solidFill>
+                    <a:srgbClr val="FF0000"/>
+                  </a:solidFill>
+                  <a:latin typeface="Horley Old Style"/>
+                </a:endParaRPr>
+              </a:p>
+            </p:txBody>
+          </p:sp>
+          <p:sp>
+            <p:nvSpPr>
+              <p:cNvPr id="4" name="TextBox 3">
+                <a:extLst>
+                  <a:ext uri="{FF2B5EF4-FFF2-40B4-BE49-F238E27FC236}">
+                    <a16:creationId xmlns:a16="http://schemas.microsoft.com/office/drawing/2014/main" id="{EE5D6E43-6BD3-89FC-1AAB-E8626A86A321}"/>
+                  </a:ext>
+                </a:extLst>
+              </p:cNvPr>
+              <p:cNvSpPr txBox="1"/>
+              <p:nvPr/>
+            </p:nvSpPr>
+            <p:spPr>
+              <a:xfrm>
+                <a:off x="415727" y="398794"/>
+                <a:ext cx="4047631" cy="790791"/>
+              </a:xfrm>
+              <a:prstGeom prst="rect">
+                <a:avLst/>
+              </a:prstGeom>
+              <a:solidFill>
+                <a:schemeClr val="accent2">
+                  <a:lumMod val="20000"/>
+                  <a:lumOff val="80000"/>
+                </a:schemeClr>
+              </a:solidFill>
+              <a:ln>
+                <a:solidFill>
+                  <a:schemeClr val="tx1"/>
+                </a:solidFill>
+              </a:ln>
+              <a:effectLst>
+                <a:outerShdw blurRad="50800" dist="38100" dir="8100000" algn="tr" rotWithShape="0">
+                  <a:prstClr val="black">
+                    <a:alpha val="40000"/>
+                  </a:prstClr>
+                </a:outerShdw>
+              </a:effectLst>
+            </p:spPr>
+            <p:txBody>
+              <a:bodyPr wrap="square">
+                <a:noAutofit/>
+              </a:bodyPr>
+              <a:lstStyle/>
+              <a:p>
+                <a:pPr>
+                  <a:lnSpc>
+                    <a:spcPts val="1650"/>
+                  </a:lnSpc>
+                  <a:buNone/>
+                </a:pPr>
+                <a:r>
+                  <a:rPr lang="en-GB" sz="1700" b="0" dirty="0">
+                    <a:solidFill>
+                      <a:srgbClr val="D73A49"/>
+                    </a:solidFill>
+                    <a:effectLst/>
+                    <a:latin typeface="Consolas" panose="020B0609020204030204" pitchFamily="49" charset="0"/>
+                  </a:rPr>
+                  <a:t>from</a:t>
+                </a:r>
+                <a:r>
+                  <a:rPr lang="en-GB" sz="1700" b="0" dirty="0">
+                    <a:solidFill>
+                      <a:srgbClr val="24292E"/>
+                    </a:solidFill>
+                    <a:effectLst/>
+                    <a:latin typeface="Consolas" panose="020B0609020204030204" pitchFamily="49" charset="0"/>
+                  </a:rPr>
+                  <a:t> </a:t>
+                </a:r>
+                <a:r>
+                  <a:rPr lang="en-GB" sz="1700" b="1" dirty="0">
+                    <a:solidFill>
+                      <a:srgbClr val="24292E"/>
+                    </a:solidFill>
+                    <a:effectLst>
+                      <a:outerShdw blurRad="38100" dist="38100" dir="2700000" algn="tl">
+                        <a:srgbClr val="000000">
+                          <a:alpha val="43137"/>
+                        </a:srgbClr>
+                      </a:outerShdw>
+                    </a:effectLst>
+                    <a:latin typeface="Consolas" panose="020B0609020204030204" pitchFamily="49" charset="0"/>
+                  </a:rPr>
+                  <a:t>path</a:t>
+                </a:r>
+                <a:r>
+                  <a:rPr lang="en-GB" sz="1700" b="0" dirty="0">
+                    <a:solidFill>
+                      <a:srgbClr val="24292E"/>
+                    </a:solidFill>
+                    <a:effectLst/>
+                    <a:latin typeface="Consolas" panose="020B0609020204030204" pitchFamily="49" charset="0"/>
+                  </a:rPr>
+                  <a:t>lib import </a:t>
+                </a:r>
+                <a:r>
+                  <a:rPr lang="en-GB" sz="1700" b="1" dirty="0">
+                    <a:solidFill>
+                      <a:srgbClr val="FF0000"/>
+                    </a:solidFill>
+                    <a:effectLst/>
+                    <a:latin typeface="Consolas" panose="020B0609020204030204" pitchFamily="49" charset="0"/>
+                  </a:rPr>
+                  <a:t>Path </a:t>
+                </a:r>
+              </a:p>
+              <a:p>
+                <a:pPr>
+                  <a:lnSpc>
+                    <a:spcPts val="1650"/>
+                  </a:lnSpc>
+                  <a:buNone/>
+                </a:pPr>
+                <a:r>
+                  <a:rPr lang="en-GB" sz="1700" b="0" dirty="0">
+                    <a:solidFill>
+                      <a:srgbClr val="D73A49"/>
+                    </a:solidFill>
+                    <a:effectLst/>
+                    <a:latin typeface="Consolas" panose="020B0609020204030204" pitchFamily="49" charset="0"/>
+                  </a:rPr>
+                  <a:t>from</a:t>
+                </a:r>
+                <a:r>
+                  <a:rPr lang="en-GB" sz="1700" b="0" dirty="0">
+                    <a:solidFill>
+                      <a:srgbClr val="24292E"/>
+                    </a:solidFill>
+                    <a:effectLst/>
+                    <a:latin typeface="Consolas" panose="020B0609020204030204" pitchFamily="49" charset="0"/>
+                  </a:rPr>
+                  <a:t> </a:t>
+                </a:r>
+                <a:r>
+                  <a:rPr lang="en-GB" sz="1700" b="1" dirty="0">
+                    <a:solidFill>
+                      <a:srgbClr val="24292E"/>
+                    </a:solidFill>
+                    <a:effectLst>
+                      <a:outerShdw blurRad="38100" dist="38100" dir="2700000" algn="tl">
+                        <a:srgbClr val="000000">
+                          <a:alpha val="43137"/>
+                        </a:srgbClr>
+                      </a:outerShdw>
+                    </a:effectLst>
+                    <a:latin typeface="Consolas" panose="020B0609020204030204" pitchFamily="49" charset="0"/>
+                  </a:rPr>
+                  <a:t>PIL</a:t>
+                </a:r>
+                <a:r>
+                  <a:rPr lang="en-GB" sz="1700" b="0" dirty="0">
+                    <a:solidFill>
+                      <a:srgbClr val="24292E"/>
+                    </a:solidFill>
+                    <a:effectLst/>
+                    <a:latin typeface="Consolas" panose="020B0609020204030204" pitchFamily="49" charset="0"/>
+                  </a:rPr>
+                  <a:t> import </a:t>
+                </a:r>
+                <a:r>
+                  <a:rPr lang="en-GB" sz="1700" b="1" dirty="0">
+                    <a:solidFill>
+                      <a:srgbClr val="FF0000"/>
+                    </a:solidFill>
+                    <a:effectLst/>
+                    <a:latin typeface="Consolas" panose="020B0609020204030204" pitchFamily="49" charset="0"/>
+                  </a:rPr>
+                  <a:t>Image </a:t>
+                </a:r>
+              </a:p>
+              <a:p>
+                <a:pPr>
+                  <a:lnSpc>
+                    <a:spcPts val="1650"/>
+                  </a:lnSpc>
+                  <a:buNone/>
+                </a:pPr>
+                <a:r>
+                  <a:rPr lang="en-GB" sz="1700" b="0" dirty="0">
+                    <a:solidFill>
+                      <a:srgbClr val="D73A49"/>
+                    </a:solidFill>
+                    <a:effectLst/>
+                    <a:latin typeface="Consolas" panose="020B0609020204030204" pitchFamily="49" charset="0"/>
+                  </a:rPr>
+                  <a:t>from</a:t>
+                </a:r>
+                <a:r>
+                  <a:rPr lang="en-GB" sz="1700" b="0" dirty="0">
+                    <a:solidFill>
+                      <a:srgbClr val="24292E"/>
+                    </a:solidFill>
+                    <a:effectLst/>
+                    <a:latin typeface="Consolas" panose="020B0609020204030204" pitchFamily="49" charset="0"/>
+                  </a:rPr>
+                  <a:t> </a:t>
+                </a:r>
+                <a:r>
+                  <a:rPr lang="en-GB" sz="1700" b="0" dirty="0">
+                    <a:solidFill>
+                      <a:srgbClr val="005CC5"/>
+                    </a:solidFill>
+                    <a:effectLst/>
+                    <a:latin typeface="Consolas" panose="020B0609020204030204" pitchFamily="49" charset="0"/>
+                  </a:rPr>
+                  <a:t>pix2tex</a:t>
+                </a:r>
+                <a:r>
+                  <a:rPr lang="en-GB" sz="1700" b="0" dirty="0">
+                    <a:solidFill>
+                      <a:srgbClr val="24292E"/>
+                    </a:solidFill>
+                    <a:effectLst/>
+                    <a:latin typeface="Consolas" panose="020B0609020204030204" pitchFamily="49" charset="0"/>
+                  </a:rPr>
+                  <a:t>.</a:t>
+                </a:r>
+                <a:r>
+                  <a:rPr lang="en-GB" sz="1700" b="0" dirty="0">
+                    <a:solidFill>
+                      <a:srgbClr val="005CC5"/>
+                    </a:solidFill>
+                    <a:effectLst/>
+                    <a:latin typeface="Consolas" panose="020B0609020204030204" pitchFamily="49" charset="0"/>
+                  </a:rPr>
+                  <a:t>cli</a:t>
+                </a:r>
+                <a:r>
+                  <a:rPr lang="en-GB" sz="1700" b="0" dirty="0">
+                    <a:solidFill>
+                      <a:srgbClr val="24292E"/>
+                    </a:solidFill>
+                    <a:effectLst/>
+                    <a:latin typeface="Consolas" panose="020B0609020204030204" pitchFamily="49" charset="0"/>
+                  </a:rPr>
+                  <a:t> import </a:t>
+                </a:r>
+                <a:r>
+                  <a:rPr lang="en-GB" sz="1700" b="1" dirty="0">
+                    <a:solidFill>
+                      <a:srgbClr val="24292E"/>
+                    </a:solidFill>
+                    <a:effectLst>
+                      <a:outerShdw blurRad="38100" dist="38100" dir="2700000" algn="tl">
+                        <a:srgbClr val="000000">
+                          <a:alpha val="43137"/>
+                        </a:srgbClr>
+                      </a:outerShdw>
+                    </a:effectLst>
+                    <a:latin typeface="Consolas" panose="020B0609020204030204" pitchFamily="49" charset="0"/>
+                  </a:rPr>
+                  <a:t>Latex</a:t>
+                </a:r>
+                <a:r>
+                  <a:rPr lang="en-GB" sz="1700" b="1" u="sng" dirty="0">
+                    <a:solidFill>
+                      <a:srgbClr val="FF0000"/>
+                    </a:solidFill>
+                    <a:effectLst/>
+                    <a:latin typeface="Consolas" panose="020B0609020204030204" pitchFamily="49" charset="0"/>
+                  </a:rPr>
+                  <a:t>OCR</a:t>
+                </a:r>
+              </a:p>
+            </p:txBody>
+          </p:sp>
+          <p:sp>
+            <p:nvSpPr>
+              <p:cNvPr id="8" name="TextBox 7">
+                <a:extLst>
+                  <a:ext uri="{FF2B5EF4-FFF2-40B4-BE49-F238E27FC236}">
+                    <a16:creationId xmlns:a16="http://schemas.microsoft.com/office/drawing/2014/main" id="{0DF48F6B-202D-804C-DD1A-BF2B87077026}"/>
+                  </a:ext>
+                </a:extLst>
+              </p:cNvPr>
+              <p:cNvSpPr txBox="1"/>
+              <p:nvPr/>
+            </p:nvSpPr>
+            <p:spPr>
+              <a:xfrm>
+                <a:off x="4715533" y="493064"/>
+                <a:ext cx="4383199" cy="616235"/>
+              </a:xfrm>
+              <a:prstGeom prst="rect">
+                <a:avLst/>
+              </a:prstGeom>
+              <a:noFill/>
+            </p:spPr>
+            <p:txBody>
+              <a:bodyPr wrap="square" lIns="0" tIns="0" rIns="0" bIns="0" anchor="ctr" anchorCtr="0">
+                <a:noAutofit/>
+              </a:bodyPr>
+              <a:lstStyle/>
+              <a:p>
+                <a:pPr>
+                  <a:buNone/>
+                </a:pPr>
+                <a:r>
+                  <a:rPr lang="pt-BR" sz="2400" b="1" noProof="0" dirty="0">
+                    <a:effectLst>
+                      <a:outerShdw blurRad="38100" dist="38100" dir="2700000" algn="tl">
+                        <a:srgbClr val="000000">
+                          <a:alpha val="43137"/>
+                        </a:srgbClr>
+                      </a:outerShdw>
+                    </a:effectLst>
+                    <a:latin typeface="Horley Old Style"/>
+                  </a:rPr>
+                  <a:t>Path</a:t>
+                </a:r>
+                <a:r>
+                  <a:rPr lang="pt-BR" sz="2400" b="1" noProof="0" dirty="0">
+                    <a:solidFill>
+                      <a:srgbClr val="FF0000"/>
+                    </a:solidFill>
+                    <a:effectLst>
+                      <a:outerShdw blurRad="38100" dist="38100" dir="2700000" algn="tl">
+                        <a:srgbClr val="000000">
+                          <a:alpha val="43137"/>
+                        </a:srgbClr>
+                      </a:outerShdw>
+                    </a:effectLst>
+                    <a:latin typeface="Horley Old Style"/>
+                  </a:rPr>
+                  <a:t>lib</a:t>
+                </a:r>
+                <a:r>
+                  <a:rPr lang="pt-BR" sz="2400" noProof="0" dirty="0">
+                    <a:latin typeface="Horley Old Style"/>
+                  </a:rPr>
+                  <a:t>  - Caminho até a figura: </a:t>
+                </a:r>
+              </a:p>
+              <a:p>
+                <a:pPr algn="ctr">
+                  <a:buNone/>
+                </a:pPr>
+                <a:r>
+                  <a:rPr lang="pt-BR" sz="2400" noProof="0" dirty="0"/>
+                  <a:t>sistema orientado a objetos</a:t>
+                </a:r>
+                <a:endParaRPr lang="pt-BR" sz="2400" b="1" u="sng" noProof="0" dirty="0">
+                  <a:solidFill>
+                    <a:srgbClr val="FF0000"/>
+                  </a:solidFill>
+                  <a:latin typeface="Horley Old Style"/>
+                </a:endParaRPr>
+              </a:p>
+            </p:txBody>
+          </p:sp>
+        </p:grpSp>
+        <p:grpSp>
+          <p:nvGrpSpPr>
+            <p:cNvPr id="38" name="Group 37">
+              <a:extLst>
+                <a:ext uri="{FF2B5EF4-FFF2-40B4-BE49-F238E27FC236}">
+                  <a16:creationId xmlns:a16="http://schemas.microsoft.com/office/drawing/2014/main" id="{692C0CAD-0539-F470-8BE1-EC28143391AC}"/>
+                </a:ext>
+              </a:extLst>
+            </p:cNvPr>
+            <p:cNvGrpSpPr/>
+            <p:nvPr/>
+          </p:nvGrpSpPr>
+          <p:grpSpPr>
+            <a:xfrm>
+              <a:off x="1327531" y="4158348"/>
+              <a:ext cx="8416059" cy="2222446"/>
+              <a:chOff x="1026424" y="4269235"/>
+              <a:chExt cx="8416059" cy="2222446"/>
+            </a:xfrm>
+          </p:grpSpPr>
+          <p:grpSp>
+            <p:nvGrpSpPr>
+              <p:cNvPr id="12" name="Group 11">
+                <a:extLst>
+                  <a:ext uri="{FF2B5EF4-FFF2-40B4-BE49-F238E27FC236}">
+                    <a16:creationId xmlns:a16="http://schemas.microsoft.com/office/drawing/2014/main" id="{161F6DEA-096C-F555-48BB-1E739BC6EBAB}"/>
+                  </a:ext>
+                </a:extLst>
+              </p:cNvPr>
+              <p:cNvGrpSpPr/>
+              <p:nvPr/>
+            </p:nvGrpSpPr>
+            <p:grpSpPr>
+              <a:xfrm>
+                <a:off x="1026424" y="4269235"/>
+                <a:ext cx="8416059" cy="2222446"/>
+                <a:chOff x="1309228" y="3959086"/>
+                <a:chExt cx="8416059" cy="2222446"/>
+              </a:xfrm>
+            </p:grpSpPr>
+            <p:sp>
+              <p:nvSpPr>
+                <p:cNvPr id="19" name="TextBox 18">
+                  <a:extLst>
+                    <a:ext uri="{FF2B5EF4-FFF2-40B4-BE49-F238E27FC236}">
+                      <a16:creationId xmlns:a16="http://schemas.microsoft.com/office/drawing/2014/main" id="{C293EDE8-16DF-FE06-8E36-C4C5AF57730B}"/>
+                    </a:ext>
+                  </a:extLst>
+                </p:cNvPr>
+                <p:cNvSpPr txBox="1"/>
+                <p:nvPr/>
+              </p:nvSpPr>
+              <p:spPr>
+                <a:xfrm>
+                  <a:off x="4939491" y="5109387"/>
+                  <a:ext cx="1753921" cy="461665"/>
+                </a:xfrm>
+                <a:prstGeom prst="rect">
+                  <a:avLst/>
+                </a:prstGeom>
+                <a:noFill/>
+              </p:spPr>
+              <p:txBody>
+                <a:bodyPr wrap="square">
+                  <a:spAutoFit/>
+                </a:bodyPr>
+                <a:lstStyle/>
+                <a:p>
+                  <a:r>
+                    <a:rPr lang="pt-BR" sz="2400" b="1" dirty="0">
+                      <a:solidFill>
+                        <a:srgbClr val="0000FF"/>
+                      </a:solidFill>
+                      <a:effectLst>
+                        <a:outerShdw blurRad="38100" dist="38100" dir="2700000" algn="tl">
+                          <a:srgbClr val="000000">
+                            <a:alpha val="43137"/>
+                          </a:srgbClr>
+                        </a:outerShdw>
+                      </a:effectLst>
+                    </a:rPr>
+                    <a:t>OCR Model</a:t>
+                  </a:r>
+                  <a:endParaRPr lang="en-US" b="1" dirty="0">
+                    <a:solidFill>
+                      <a:srgbClr val="0000FF"/>
+                    </a:solidFill>
+                    <a:effectLst>
+                      <a:outerShdw blurRad="38100" dist="38100" dir="2700000" algn="tl">
+                        <a:srgbClr val="000000">
+                          <a:alpha val="43137"/>
+                        </a:srgbClr>
+                      </a:outerShdw>
+                    </a:effectLst>
+                  </a:endParaRPr>
+                </a:p>
+              </p:txBody>
+            </p:sp>
+            <p:pic>
+              <p:nvPicPr>
+                <p:cNvPr id="20" name="Picture 19">
+                  <a:extLst>
+                    <a:ext uri="{FF2B5EF4-FFF2-40B4-BE49-F238E27FC236}">
+                      <a16:creationId xmlns:a16="http://schemas.microsoft.com/office/drawing/2014/main" id="{A2544E92-B766-6FF1-86F4-389E2A3BF8C4}"/>
+                    </a:ext>
+                  </a:extLst>
+                </p:cNvPr>
+                <p:cNvPicPr>
+                  <a:picLocks noChangeAspect="1"/>
+                </p:cNvPicPr>
+                <p:nvPr/>
+              </p:nvPicPr>
+              <p:blipFill>
+                <a:blip r:embed="rId4">
+                  <a:extLst>
+                    <a:ext uri="{BEBA8EAE-BF5A-486C-A8C5-ECC9F3942E4B}">
+                      <a14:imgProps xmlns:a14="http://schemas.microsoft.com/office/drawing/2010/main">
+                        <a14:imgLayer r:embed="rId5">
+                          <a14:imgEffect>
+                            <a14:artisticTexturizer/>
+                          </a14:imgEffect>
+                        </a14:imgLayer>
+                      </a14:imgProps>
+                    </a:ext>
+                  </a:extLst>
+                </a:blip>
+                <a:srcRect l="5358" t="3913" r="4219" b="19578"/>
+                <a:stretch>
+                  <a:fillRect/>
+                </a:stretch>
+              </p:blipFill>
+              <p:spPr>
+                <a:xfrm>
+                  <a:off x="1309228" y="3959087"/>
+                  <a:ext cx="2855168" cy="991516"/>
+                </a:xfrm>
+                <a:prstGeom prst="rect">
+                  <a:avLst/>
+                </a:prstGeom>
+                <a:solidFill>
+                  <a:schemeClr val="bg1"/>
+                </a:solidFill>
+                <a:ln>
+                  <a:solidFill>
+                    <a:schemeClr val="tx1"/>
+                  </a:solidFill>
+                </a:ln>
+                <a:effectLst>
+                  <a:outerShdw blurRad="50800" dist="38100" dir="8100000" algn="tr" rotWithShape="0">
+                    <a:prstClr val="black">
+                      <a:alpha val="40000"/>
+                    </a:prstClr>
+                  </a:outerShdw>
+                </a:effectLst>
+              </p:spPr>
+            </p:pic>
+            <mc:AlternateContent xmlns:mc="http://schemas.openxmlformats.org/markup-compatibility/2006" xmlns:a14="http://schemas.microsoft.com/office/drawing/2010/main">
+              <mc:Choice Requires="a14">
+                <p:sp>
+                  <p:nvSpPr>
+                    <p:cNvPr id="21" name="TextBox 20">
+                      <a:extLst>
+                        <a:ext uri="{FF2B5EF4-FFF2-40B4-BE49-F238E27FC236}">
+                          <a16:creationId xmlns:a16="http://schemas.microsoft.com/office/drawing/2014/main" id="{EEB9D3AA-61DD-D3B6-66D1-7BB9309E52FF}"/>
+                        </a:ext>
+                      </a:extLst>
+                    </p:cNvPr>
+                    <p:cNvSpPr txBox="1"/>
+                    <p:nvPr/>
+                  </p:nvSpPr>
+                  <p:spPr>
+                    <a:xfrm>
+                      <a:off x="7190722" y="3959086"/>
+                      <a:ext cx="2534565" cy="1111287"/>
+                    </a:xfrm>
+                    <a:prstGeom prst="rect">
+                      <a:avLst/>
+                    </a:prstGeom>
+                    <a:solidFill>
+                      <a:srgbClr val="E7E7FF"/>
+                    </a:solidFill>
+                    <a:ln>
+                      <a:solidFill>
+                        <a:schemeClr val="tx1"/>
+                      </a:solidFill>
+                    </a:ln>
+                    <a:effectLst>
+                      <a:outerShdw blurRad="50800" dist="38100" dir="8100000" algn="tr" rotWithShape="0">
+                        <a:prstClr val="black">
+                          <a:alpha val="40000"/>
+                        </a:prstClr>
+                      </a:outerShdw>
+                    </a:effectLst>
+                  </p:spPr>
+                  <p:txBody>
+                    <a:bodyPr wrap="square" lIns="0" tIns="0" rIns="0" bIns="0" rtlCol="0" anchor="ctr" anchorCtr="0">
+                      <a:noAutofit/>
+                    </a:bodyPr>
+                    <a:lstStyle/>
+                    <a:p>
+                      <a:pPr/>
+                      <a14:m>
+                        <m:oMathPara xmlns:m="http://schemas.openxmlformats.org/officeDocument/2006/math">
+                          <m:oMathParaPr>
+                            <m:jc m:val="centerGroup"/>
+                          </m:oMathParaPr>
+                          <m:oMath xmlns:m="http://schemas.openxmlformats.org/officeDocument/2006/math">
+                            <m:f>
+                              <m:fPr>
+                                <m:ctrlPr>
+                                  <a:rPr lang="en-US" sz="3200" b="1" i="1" smtClean="0">
+                                    <a:effectLst>
+                                      <a:outerShdw blurRad="38100" dist="38100" dir="2700000" algn="tl">
+                                        <a:srgbClr val="000000">
+                                          <a:alpha val="43137"/>
+                                        </a:srgbClr>
+                                      </a:outerShdw>
+                                    </a:effectLst>
+                                    <a:latin typeface="Cambria Math" panose="02040503050406030204" pitchFamily="18" charset="0"/>
+                                  </a:rPr>
+                                </m:ctrlPr>
+                              </m:fPr>
+                              <m:num>
+                                <m:r>
+                                  <a:rPr lang="en-US" sz="3200" b="1" i="1" smtClean="0">
+                                    <a:effectLst>
+                                      <a:outerShdw blurRad="38100" dist="38100" dir="2700000" algn="tl">
+                                        <a:srgbClr val="000000">
+                                          <a:alpha val="43137"/>
+                                        </a:srgbClr>
+                                      </a:outerShdw>
+                                    </a:effectLst>
+                                    <a:latin typeface="Cambria Math" panose="02040503050406030204" pitchFamily="18" charset="0"/>
+                                    <a:ea typeface="Cambria Math" panose="02040503050406030204" pitchFamily="18" charset="0"/>
+                                  </a:rPr>
+                                  <m:t>𝝏</m:t>
+                                </m:r>
+                                <m:r>
+                                  <a:rPr lang="en-US" sz="3200" b="1" i="1" smtClean="0">
+                                    <a:effectLst>
+                                      <a:outerShdw blurRad="38100" dist="38100" dir="2700000" algn="tl">
+                                        <a:srgbClr val="000000">
+                                          <a:alpha val="43137"/>
+                                        </a:srgbClr>
+                                      </a:outerShdw>
+                                    </a:effectLst>
+                                    <a:latin typeface="Cambria Math" panose="02040503050406030204" pitchFamily="18" charset="0"/>
+                                    <a:ea typeface="Cambria Math" panose="02040503050406030204" pitchFamily="18" charset="0"/>
+                                  </a:rPr>
+                                  <m:t>∅</m:t>
+                                </m:r>
+                              </m:num>
+                              <m:den>
+                                <m:r>
+                                  <a:rPr lang="en-US" sz="3200" b="1" i="1">
+                                    <a:effectLst>
+                                      <a:outerShdw blurRad="38100" dist="38100" dir="2700000" algn="tl">
+                                        <a:srgbClr val="000000">
+                                          <a:alpha val="43137"/>
+                                        </a:srgbClr>
+                                      </a:outerShdw>
+                                    </a:effectLst>
+                                    <a:latin typeface="Cambria Math" panose="02040503050406030204" pitchFamily="18" charset="0"/>
+                                    <a:ea typeface="Cambria Math" panose="02040503050406030204" pitchFamily="18" charset="0"/>
+                                  </a:rPr>
+                                  <m:t>𝝏</m:t>
+                                </m:r>
+                                <m:r>
+                                  <a:rPr lang="pt-BR" sz="3200" b="1" i="1" smtClean="0">
+                                    <a:effectLst>
+                                      <a:outerShdw blurRad="38100" dist="38100" dir="2700000" algn="tl">
+                                        <a:srgbClr val="000000">
+                                          <a:alpha val="43137"/>
+                                        </a:srgbClr>
+                                      </a:outerShdw>
+                                    </a:effectLst>
+                                    <a:latin typeface="Cambria Math" panose="02040503050406030204" pitchFamily="18" charset="0"/>
+                                    <a:ea typeface="Cambria Math" panose="02040503050406030204" pitchFamily="18" charset="0"/>
+                                  </a:rPr>
+                                  <m:t>𝒕</m:t>
+                                </m:r>
+                              </m:den>
+                            </m:f>
+                            <m:r>
+                              <a:rPr lang="pt-BR" sz="3200" b="1" i="1" smtClean="0">
+                                <a:effectLst>
+                                  <a:outerShdw blurRad="38100" dist="38100" dir="2700000" algn="tl">
+                                    <a:srgbClr val="000000">
+                                      <a:alpha val="43137"/>
+                                    </a:srgbClr>
+                                  </a:outerShdw>
+                                </a:effectLst>
+                                <a:latin typeface="Cambria Math" panose="02040503050406030204" pitchFamily="18" charset="0"/>
+                              </a:rPr>
+                              <m:t>=</m:t>
+                            </m:r>
+                            <m:r>
+                              <a:rPr lang="pt-BR" sz="3200" b="1" i="1" smtClean="0">
+                                <a:effectLst>
+                                  <a:outerShdw blurRad="38100" dist="38100" dir="2700000" algn="tl">
+                                    <a:srgbClr val="000000">
+                                      <a:alpha val="43137"/>
+                                    </a:srgbClr>
+                                  </a:outerShdw>
+                                </a:effectLst>
+                                <a:latin typeface="Cambria Math" panose="02040503050406030204" pitchFamily="18" charset="0"/>
+                              </a:rPr>
+                              <m:t>𝑫</m:t>
+                            </m:r>
+                            <m:sSup>
+                              <m:sSupPr>
+                                <m:ctrlPr>
+                                  <a:rPr lang="pt-BR" sz="3200" b="1" i="1" smtClean="0">
+                                    <a:effectLst>
+                                      <a:outerShdw blurRad="38100" dist="38100" dir="2700000" algn="tl">
+                                        <a:srgbClr val="000000">
+                                          <a:alpha val="43137"/>
+                                        </a:srgbClr>
+                                      </a:outerShdw>
+                                    </a:effectLst>
+                                    <a:latin typeface="Cambria Math" panose="02040503050406030204" pitchFamily="18" charset="0"/>
+                                  </a:rPr>
+                                </m:ctrlPr>
+                              </m:sSupPr>
+                              <m:e>
+                                <m:r>
+                                  <a:rPr lang="pt-BR" sz="3200" b="1" i="0" smtClean="0">
+                                    <a:effectLst>
+                                      <a:outerShdw blurRad="38100" dist="38100" dir="2700000" algn="tl">
+                                        <a:srgbClr val="000000">
+                                          <a:alpha val="43137"/>
+                                        </a:srgbClr>
+                                      </a:outerShdw>
+                                    </a:effectLst>
+                                    <a:latin typeface="Cambria Math" panose="02040503050406030204" pitchFamily="18" charset="0"/>
+                                    <a:ea typeface="Cambria Math" panose="02040503050406030204" pitchFamily="18" charset="0"/>
+                                  </a:rPr>
+                                  <m:t>𝛁</m:t>
+                                </m:r>
+                              </m:e>
+                              <m:sup>
+                                <m:r>
+                                  <a:rPr lang="pt-BR" sz="3200" b="1" i="1" smtClean="0">
+                                    <a:effectLst>
+                                      <a:outerShdw blurRad="38100" dist="38100" dir="2700000" algn="tl">
+                                        <a:srgbClr val="000000">
+                                          <a:alpha val="43137"/>
+                                        </a:srgbClr>
+                                      </a:outerShdw>
+                                    </a:effectLst>
+                                    <a:latin typeface="Cambria Math" panose="02040503050406030204" pitchFamily="18" charset="0"/>
+                                  </a:rPr>
+                                  <m:t>𝟐</m:t>
+                                </m:r>
+                              </m:sup>
+                            </m:sSup>
+                            <m:r>
+                              <a:rPr lang="en-US" sz="3200" b="1" i="1">
+                                <a:effectLst>
+                                  <a:outerShdw blurRad="38100" dist="38100" dir="2700000" algn="tl">
+                                    <a:srgbClr val="000000">
+                                      <a:alpha val="43137"/>
+                                    </a:srgbClr>
+                                  </a:outerShdw>
+                                </a:effectLst>
+                                <a:latin typeface="Cambria Math" panose="02040503050406030204" pitchFamily="18" charset="0"/>
+                                <a:ea typeface="Cambria Math" panose="02040503050406030204" pitchFamily="18" charset="0"/>
+                              </a:rPr>
+                              <m:t>∅</m:t>
+                            </m:r>
+                          </m:oMath>
+                        </m:oMathPara>
+                      </a14:m>
+                      <a:endParaRPr lang="LID4096" sz="3200" b="1" i="1" dirty="0">
+                        <a:effectLst>
+                          <a:outerShdw blurRad="38100" dist="38100" dir="2700000" algn="tl">
+                            <a:srgbClr val="000000">
+                              <a:alpha val="43137"/>
+                            </a:srgbClr>
+                          </a:outerShdw>
+                        </a:effectLst>
+                      </a:endParaRPr>
+                    </a:p>
+                  </p:txBody>
+                </p:sp>
+              </mc:Choice>
+              <mc:Fallback xmlns="">
+                <p:sp>
+                  <p:nvSpPr>
+                    <p:cNvPr id="21" name="TextBox 20">
+                      <a:extLst>
+                        <a:ext uri="{FF2B5EF4-FFF2-40B4-BE49-F238E27FC236}">
+                          <a16:creationId xmlns:a16="http://schemas.microsoft.com/office/drawing/2014/main" id="{EEB9D3AA-61DD-D3B6-66D1-7BB9309E52FF}"/>
+                        </a:ext>
+                      </a:extLst>
+                    </p:cNvPr>
+                    <p:cNvSpPr txBox="1">
+                      <a:spLocks noRot="1" noChangeAspect="1" noMove="1" noResize="1" noEditPoints="1" noAdjustHandles="1" noChangeArrowheads="1" noChangeShapeType="1" noTextEdit="1"/>
+                    </p:cNvSpPr>
+                    <p:nvPr/>
+                  </p:nvSpPr>
+                  <p:spPr>
+                    <a:xfrm>
+                      <a:off x="7190722" y="3959086"/>
+                      <a:ext cx="2534565" cy="1111287"/>
+                    </a:xfrm>
+                    <a:prstGeom prst="rect">
+                      <a:avLst/>
+                    </a:prstGeom>
+                    <a:blipFill>
+                      <a:blip r:embed="rId6"/>
+                      <a:stretch>
+                        <a:fillRect/>
+                      </a:stretch>
+                    </a:blipFill>
+                    <a:ln>
+                      <a:solidFill>
+                        <a:schemeClr val="tx1"/>
+                      </a:solidFill>
+                    </a:ln>
+                    <a:effectLst>
+                      <a:outerShdw blurRad="50800" dist="38100" dir="8100000" algn="tr" rotWithShape="0">
+                        <a:prstClr val="black">
+                          <a:alpha val="40000"/>
+                        </a:prstClr>
+                      </a:outerShdw>
+                    </a:effectLst>
+                  </p:spPr>
+                  <p:txBody>
+                    <a:bodyPr/>
+                    <a:lstStyle/>
+                    <a:p>
+                      <a:r>
+                        <a:rPr lang="LID4096">
+                          <a:noFill/>
+                        </a:rPr>
+                        <a:t> </a:t>
+                      </a:r>
+                    </a:p>
+                  </p:txBody>
+                </p:sp>
+              </mc:Fallback>
+            </mc:AlternateContent>
+            <p:sp>
+              <p:nvSpPr>
+                <p:cNvPr id="22" name="TextBox 21">
+                  <a:extLst>
+                    <a:ext uri="{FF2B5EF4-FFF2-40B4-BE49-F238E27FC236}">
+                      <a16:creationId xmlns:a16="http://schemas.microsoft.com/office/drawing/2014/main" id="{A142396D-445C-B152-597E-8DCA03BE4ECC}"/>
+                    </a:ext>
+                  </a:extLst>
+                </p:cNvPr>
+                <p:cNvSpPr txBox="1"/>
+                <p:nvPr/>
+              </p:nvSpPr>
+              <p:spPr>
+                <a:xfrm>
+                  <a:off x="2063994" y="5565297"/>
+                  <a:ext cx="7661293" cy="616235"/>
+                </a:xfrm>
+                <a:prstGeom prst="rect">
+                  <a:avLst/>
+                </a:prstGeom>
+                <a:solidFill>
+                  <a:srgbClr val="E7E7FF"/>
+                </a:solidFill>
+                <a:ln>
+                  <a:solidFill>
+                    <a:schemeClr val="tx1"/>
+                  </a:solidFill>
+                </a:ln>
+                <a:effectLst>
+                  <a:outerShdw blurRad="50800" dist="38100" dir="8100000" algn="tr" rotWithShape="0">
+                    <a:prstClr val="black">
+                      <a:alpha val="40000"/>
+                    </a:prstClr>
+                  </a:outerShdw>
+                </a:effectLst>
+              </p:spPr>
+              <p:txBody>
+                <a:bodyPr wrap="square" anchor="ctr" anchorCtr="0">
+                  <a:noAutofit/>
+                </a:bodyPr>
+                <a:lstStyle/>
+                <a:p>
+                  <a:pPr algn="ctr">
+                    <a:buNone/>
+                  </a:pPr>
+                  <a:r>
+                    <a:rPr lang="en-US" sz="2000" b="1" dirty="0">
+                      <a:solidFill>
+                        <a:srgbClr val="D73A49"/>
+                      </a:solidFill>
+                      <a:effectLst/>
+                      <a:latin typeface="Consolas" panose="020B0609020204030204" pitchFamily="49" charset="0"/>
+                    </a:rPr>
+                    <a:t>\</a:t>
+                  </a:r>
+                  <a:r>
+                    <a:rPr lang="en-US" sz="2000" b="1" dirty="0">
+                      <a:solidFill>
+                        <a:srgbClr val="6F42C1"/>
+                      </a:solidFill>
+                      <a:effectLst/>
+                      <a:latin typeface="Consolas" panose="020B0609020204030204" pitchFamily="49" charset="0"/>
+                    </a:rPr>
+                    <a:t>frac </a:t>
+                  </a:r>
+                  <a:r>
+                    <a:rPr lang="en-US" sz="2000" b="1" dirty="0">
+                      <a:solidFill>
+                        <a:srgbClr val="24292E"/>
+                      </a:solidFill>
+                      <a:effectLst/>
+                      <a:latin typeface="Consolas" panose="020B0609020204030204" pitchFamily="49" charset="0"/>
+                    </a:rPr>
+                    <a:t>{</a:t>
+                  </a:r>
+                  <a:r>
+                    <a:rPr lang="en-US" sz="2000" b="1" dirty="0">
+                      <a:solidFill>
+                        <a:srgbClr val="005CC5"/>
+                      </a:solidFill>
+                      <a:effectLst/>
+                      <a:latin typeface="Consolas" panose="020B0609020204030204" pitchFamily="49" charset="0"/>
+                    </a:rPr>
+                    <a:t>\partial\phi</a:t>
+                  </a:r>
+                  <a:r>
+                    <a:rPr lang="en-US" sz="2000" b="1" dirty="0">
+                      <a:solidFill>
+                        <a:srgbClr val="24292E"/>
+                      </a:solidFill>
+                      <a:effectLst/>
+                      <a:latin typeface="Consolas" panose="020B0609020204030204" pitchFamily="49" charset="0"/>
+                    </a:rPr>
+                    <a:t>} {</a:t>
+                  </a:r>
+                  <a:r>
+                    <a:rPr lang="en-US" sz="2000" b="1" dirty="0">
+                      <a:solidFill>
+                        <a:srgbClr val="005CC5"/>
+                      </a:solidFill>
+                      <a:effectLst/>
+                      <a:latin typeface="Consolas" panose="020B0609020204030204" pitchFamily="49" charset="0"/>
+                    </a:rPr>
+                    <a:t>\partial </a:t>
+                  </a:r>
+                  <a:r>
+                    <a:rPr lang="en-US" sz="2000" b="1" dirty="0">
+                      <a:solidFill>
+                        <a:srgbClr val="24292E"/>
+                      </a:solidFill>
+                      <a:effectLst/>
+                      <a:latin typeface="Consolas" panose="020B0609020204030204" pitchFamily="49" charset="0"/>
+                    </a:rPr>
+                    <a:t>t} = D </a:t>
+                  </a:r>
+                  <a:r>
+                    <a:rPr lang="en-US" sz="2000" b="1" dirty="0">
+                      <a:solidFill>
+                        <a:srgbClr val="005CC5"/>
+                      </a:solidFill>
+                      <a:effectLst/>
+                      <a:latin typeface="Consolas" panose="020B0609020204030204" pitchFamily="49" charset="0"/>
+                    </a:rPr>
+                    <a:t>\nabla</a:t>
+                  </a:r>
+                  <a:r>
+                    <a:rPr lang="en-US" sz="2000" b="1" dirty="0">
+                      <a:solidFill>
+                        <a:srgbClr val="24292E"/>
+                      </a:solidFill>
+                      <a:effectLst/>
+                      <a:latin typeface="Consolas" panose="020B0609020204030204" pitchFamily="49" charset="0"/>
+                    </a:rPr>
+                    <a:t>^</a:t>
+                  </a:r>
+                  <a:r>
+                    <a:rPr lang="en-US" sz="2000" b="1" dirty="0">
+                      <a:solidFill>
+                        <a:srgbClr val="005CC5"/>
+                      </a:solidFill>
+                      <a:effectLst/>
+                      <a:latin typeface="Consolas" panose="020B0609020204030204" pitchFamily="49" charset="0"/>
+                    </a:rPr>
+                    <a:t>2 \phi</a:t>
+                  </a:r>
+                  <a:endParaRPr lang="en-US" sz="2000" b="1" dirty="0">
+                    <a:solidFill>
+                      <a:srgbClr val="24292E"/>
+                    </a:solidFill>
+                    <a:effectLst/>
+                    <a:latin typeface="Consolas" panose="020B0609020204030204" pitchFamily="49" charset="0"/>
+                  </a:endParaRPr>
+                </a:p>
+              </p:txBody>
+            </p:sp>
+            <p:sp>
+              <p:nvSpPr>
+                <p:cNvPr id="23" name="Arrow: Right 22">
+                  <a:extLst>
+                    <a:ext uri="{FF2B5EF4-FFF2-40B4-BE49-F238E27FC236}">
+                      <a16:creationId xmlns:a16="http://schemas.microsoft.com/office/drawing/2014/main" id="{441FCC32-94B3-0490-7686-8397979F3ABB}"/>
+                    </a:ext>
+                  </a:extLst>
+                </p:cNvPr>
+                <p:cNvSpPr/>
+                <p:nvPr/>
+              </p:nvSpPr>
+              <p:spPr>
+                <a:xfrm rot="2162833">
+                  <a:off x="3985028" y="5057799"/>
+                  <a:ext cx="317578" cy="389449"/>
+                </a:xfrm>
+                <a:prstGeom prst="rightArrow">
+                  <a:avLst/>
+                </a:prstGeom>
+                <a:solidFill>
+                  <a:srgbClr val="0000FF"/>
+                </a:solidFill>
+                <a:effectLst>
+                  <a:outerShdw blurRad="50800" dist="38100" dir="8100000" algn="tr" rotWithShape="0">
+                    <a:prstClr val="black">
+                      <a:alpha val="40000"/>
+                    </a:prstClr>
+                  </a:outerShdw>
+                </a:effectLst>
+              </p:spPr>
+              <p:style>
+                <a:lnRef idx="2">
+                  <a:schemeClr val="accent1">
+                    <a:shade val="15000"/>
+                  </a:schemeClr>
+                </a:lnRef>
+                <a:fillRef idx="1">
+                  <a:schemeClr val="accent1"/>
+                </a:fillRef>
+                <a:effectRef idx="0">
+                  <a:schemeClr val="accent1"/>
+                </a:effectRef>
+                <a:fontRef idx="minor">
+                  <a:schemeClr val="lt1"/>
+                </a:fontRef>
+              </p:style>
+              <p:txBody>
+                <a:bodyPr rtlCol="0" anchor="ctr"/>
+                <a:lstStyle/>
+                <a:p>
+                  <a:pPr algn="ctr"/>
+                  <a:endParaRPr lang="LID4096" dirty="0"/>
+                </a:p>
+              </p:txBody>
+            </p:sp>
+            <p:sp>
+              <p:nvSpPr>
+                <p:cNvPr id="24" name="Arrow: Right 23">
+                  <a:extLst>
+                    <a:ext uri="{FF2B5EF4-FFF2-40B4-BE49-F238E27FC236}">
+                      <a16:creationId xmlns:a16="http://schemas.microsoft.com/office/drawing/2014/main" id="{8EC1D28D-75BC-1207-5C63-1FF25EE80232}"/>
+                    </a:ext>
+                  </a:extLst>
+                </p:cNvPr>
+                <p:cNvSpPr/>
+                <p:nvPr/>
+              </p:nvSpPr>
+              <p:spPr>
+                <a:xfrm rot="19808280">
+                  <a:off x="6816045" y="5003558"/>
+                  <a:ext cx="317578" cy="389449"/>
+                </a:xfrm>
+                <a:prstGeom prst="rightArrow">
+                  <a:avLst/>
+                </a:prstGeom>
+                <a:solidFill>
+                  <a:srgbClr val="0000FF"/>
+                </a:solidFill>
+                <a:effectLst>
+                  <a:outerShdw blurRad="50800" dist="38100" dir="8100000" algn="tr" rotWithShape="0">
+                    <a:prstClr val="black">
+                      <a:alpha val="40000"/>
+                    </a:prstClr>
+                  </a:outerShdw>
+                </a:effectLst>
+              </p:spPr>
+              <p:style>
+                <a:lnRef idx="2">
+                  <a:schemeClr val="accent1">
+                    <a:shade val="15000"/>
+                  </a:schemeClr>
+                </a:lnRef>
+                <a:fillRef idx="1">
+                  <a:schemeClr val="accent1"/>
+                </a:fillRef>
+                <a:effectRef idx="0">
+                  <a:schemeClr val="accent1"/>
+                </a:effectRef>
+                <a:fontRef idx="minor">
+                  <a:schemeClr val="lt1"/>
+                </a:fontRef>
+              </p:style>
+              <p:txBody>
+                <a:bodyPr rtlCol="0" anchor="ctr"/>
+                <a:lstStyle/>
+                <a:p>
+                  <a:pPr algn="ctr"/>
+                  <a:endParaRPr lang="LID4096" dirty="0"/>
+                </a:p>
+              </p:txBody>
+            </p:sp>
+          </p:grpSp>
+          <p:sp>
+            <p:nvSpPr>
+              <p:cNvPr id="34" name="TextBox 33">
+                <a:extLst>
+                  <a:ext uri="{FF2B5EF4-FFF2-40B4-BE49-F238E27FC236}">
+                    <a16:creationId xmlns:a16="http://schemas.microsoft.com/office/drawing/2014/main" id="{D44DD562-985A-8937-8F19-F8C2BF3194D4}"/>
+                  </a:ext>
+                </a:extLst>
+              </p:cNvPr>
+              <p:cNvSpPr txBox="1"/>
+              <p:nvPr/>
+            </p:nvSpPr>
+            <p:spPr>
+              <a:xfrm>
+                <a:off x="1781191" y="5480799"/>
+                <a:ext cx="1826286" cy="430887"/>
+              </a:xfrm>
+              <a:prstGeom prst="rect">
+                <a:avLst/>
+              </a:prstGeom>
+              <a:noFill/>
+            </p:spPr>
+            <p:txBody>
+              <a:bodyPr wrap="square">
+                <a:spAutoFit/>
+              </a:bodyPr>
+              <a:lstStyle/>
+              <a:p>
+                <a:pPr algn="r"/>
+                <a:r>
+                  <a:rPr lang="pt-BR" sz="2200" b="1" dirty="0">
+                    <a:solidFill>
+                      <a:srgbClr val="FF0000"/>
+                    </a:solidFill>
+                  </a:rPr>
+                  <a:t>.. predição</a:t>
+                </a:r>
+                <a:endParaRPr lang="en-US" sz="2200" b="1" dirty="0">
+                  <a:solidFill>
+                    <a:srgbClr val="FF0000"/>
+                  </a:solidFill>
+                </a:endParaRPr>
+              </a:p>
+            </p:txBody>
+          </p:sp>
+          <p:sp>
+            <p:nvSpPr>
+              <p:cNvPr id="35" name="TextBox 34">
+                <a:extLst>
+                  <a:ext uri="{FF2B5EF4-FFF2-40B4-BE49-F238E27FC236}">
+                    <a16:creationId xmlns:a16="http://schemas.microsoft.com/office/drawing/2014/main" id="{13661CDB-ECDB-730C-CC85-4898BA726687}"/>
+                  </a:ext>
+                </a:extLst>
+              </p:cNvPr>
+              <p:cNvSpPr txBox="1"/>
+              <p:nvPr/>
+            </p:nvSpPr>
+            <p:spPr>
+              <a:xfrm>
+                <a:off x="6981415" y="5473318"/>
+                <a:ext cx="2366493" cy="430887"/>
               </a:xfrm>
               <a:prstGeom prst="rect">
                 <a:avLst/>
@@ -4189,23 +4925,71 @@
               <a:lstStyle/>
               <a:p>
                 <a:r>
-                  <a:rPr lang="pt-BR" sz="2400" b="1" dirty="0">
+                  <a:rPr lang="pt-BR" sz="2200" b="1" dirty="0">
                     <a:solidFill>
-                      <a:srgbClr val="0000FF"/>
+                      <a:srgbClr val="FF0000"/>
                     </a:solidFill>
-                    <a:effectLst>
-                      <a:outerShdw blurRad="38100" dist="38100" dir="2700000" algn="tl">
-                        <a:srgbClr val="000000">
-                          <a:alpha val="43137"/>
-                        </a:srgbClr>
-                      </a:outerShdw>
-                    </a:effectLst>
                   </a:rPr>
-                  <a:t>OCR Model</a:t>
+                  <a:t>.. renderização</a:t>
                 </a:r>
-                <a:endParaRPr lang="en-US" b="1" dirty="0">
+                <a:endParaRPr lang="en-US" sz="2200" b="1" dirty="0">
                   <a:solidFill>
-                    <a:srgbClr val="0000FF"/>
+                    <a:srgbClr val="FF0000"/>
+                  </a:solidFill>
+                </a:endParaRPr>
+              </a:p>
+            </p:txBody>
+          </p:sp>
+        </p:grpSp>
+        <p:sp>
+          <p:nvSpPr>
+            <p:cNvPr id="37" name="TextBox 36">
+              <a:extLst>
+                <a:ext uri="{FF2B5EF4-FFF2-40B4-BE49-F238E27FC236}">
+                  <a16:creationId xmlns:a16="http://schemas.microsoft.com/office/drawing/2014/main" id="{773B681C-E1F4-D5EE-DE1F-CE0DA1AF95C6}"/>
+                </a:ext>
+              </a:extLst>
+            </p:cNvPr>
+            <p:cNvSpPr txBox="1"/>
+            <p:nvPr/>
+          </p:nvSpPr>
+          <p:spPr>
+            <a:xfrm>
+              <a:off x="1196975" y="3157492"/>
+              <a:ext cx="8680355" cy="790791"/>
+            </a:xfrm>
+            <a:prstGeom prst="rect">
+              <a:avLst/>
+            </a:prstGeom>
+            <a:solidFill>
+              <a:srgbClr val="E7E7FF"/>
+            </a:solidFill>
+            <a:ln>
+              <a:solidFill>
+                <a:schemeClr val="tx1"/>
+              </a:solidFill>
+            </a:ln>
+            <a:effectLst>
+              <a:outerShdw blurRad="50800" dist="38100" dir="8100000" algn="tr" rotWithShape="0">
+                <a:prstClr val="black">
+                  <a:alpha val="40000"/>
+                </a:prstClr>
+              </a:outerShdw>
+            </a:effectLst>
+          </p:spPr>
+          <p:txBody>
+            <a:bodyPr wrap="square" anchor="ctr" anchorCtr="0">
+              <a:noAutofit/>
+            </a:bodyPr>
+            <a:lstStyle/>
+            <a:p>
+              <a:pPr>
+                <a:buNone/>
+              </a:pPr>
+              <a:r>
+                <a:rPr lang="en-US" b="1" dirty="0">
+                  <a:solidFill>
+                    <a:srgbClr val="24292E"/>
                   </a:solidFill>
                   <a:effectLst>
                     <a:outerShdw blurRad="38100" dist="38100" dir="2700000" algn="tl">
@@ -4214,47 +4998,365 @@
                       </a:srgbClr>
                     </a:outerShdw>
                   </a:effectLst>
-                </a:endParaRPr>
-              </a:p>
-            </p:txBody>
-          </p:sp>
-          <p:pic>
-            <p:nvPicPr>
-              <p:cNvPr id="20" name="Picture 19">
+                  <a:latin typeface="Consolas" panose="020B0609020204030204" pitchFamily="49" charset="0"/>
+                </a:rPr>
+                <a:t>img  </a:t>
+              </a:r>
+              <a:r>
+                <a:rPr lang="en-US" b="0" dirty="0">
+                  <a:solidFill>
+                    <a:srgbClr val="24292E"/>
+                  </a:solidFill>
+                  <a:effectLst/>
+                  <a:latin typeface="Consolas" panose="020B0609020204030204" pitchFamily="49" charset="0"/>
+                </a:rPr>
+                <a:t> </a:t>
+              </a:r>
+              <a:r>
+                <a:rPr lang="en-US" b="0" dirty="0">
+                  <a:solidFill>
+                    <a:srgbClr val="D73A49"/>
+                  </a:solidFill>
+                  <a:effectLst/>
+                  <a:latin typeface="Consolas" panose="020B0609020204030204" pitchFamily="49" charset="0"/>
+                </a:rPr>
+                <a:t>= </a:t>
+              </a:r>
+              <a:r>
+                <a:rPr lang="en-US" b="0" dirty="0">
+                  <a:solidFill>
+                    <a:srgbClr val="005CC5"/>
+                  </a:solidFill>
+                  <a:effectLst/>
+                  <a:latin typeface="Consolas" panose="020B0609020204030204" pitchFamily="49" charset="0"/>
+                </a:rPr>
+                <a:t>Image</a:t>
+              </a:r>
+              <a:r>
+                <a:rPr lang="en-US" b="0" dirty="0">
+                  <a:solidFill>
+                    <a:srgbClr val="24292E"/>
+                  </a:solidFill>
+                  <a:effectLst/>
+                  <a:latin typeface="Consolas" panose="020B0609020204030204" pitchFamily="49" charset="0"/>
+                </a:rPr>
+                <a:t>.</a:t>
+              </a:r>
+              <a:r>
+                <a:rPr lang="en-US" b="0" dirty="0">
+                  <a:solidFill>
+                    <a:srgbClr val="005CC5"/>
+                  </a:solidFill>
+                  <a:effectLst/>
+                  <a:latin typeface="Consolas" panose="020B0609020204030204" pitchFamily="49" charset="0"/>
+                </a:rPr>
+                <a:t>open</a:t>
+              </a:r>
+              <a:r>
+                <a:rPr lang="en-US" b="0" dirty="0">
+                  <a:solidFill>
+                    <a:srgbClr val="24292E"/>
+                  </a:solidFill>
+                  <a:effectLst/>
+                  <a:latin typeface="Consolas" panose="020B0609020204030204" pitchFamily="49" charset="0"/>
+                </a:rPr>
+                <a:t>(</a:t>
+              </a:r>
+              <a:r>
+                <a:rPr lang="en-US" dirty="0">
+                  <a:solidFill>
+                    <a:srgbClr val="D73A49"/>
+                  </a:solidFill>
+                  <a:latin typeface="Consolas" panose="020B0609020204030204" pitchFamily="49" charset="0"/>
+                </a:rPr>
+                <a:t>Path</a:t>
+              </a:r>
+              <a:r>
+                <a:rPr lang="en-US" dirty="0">
+                  <a:solidFill>
+                    <a:srgbClr val="24292E"/>
+                  </a:solidFill>
+                  <a:latin typeface="Consolas" panose="020B0609020204030204" pitchFamily="49" charset="0"/>
+                </a:rPr>
+                <a:t>(</a:t>
+              </a:r>
+              <a:r>
+                <a:rPr lang="en-US" dirty="0">
+                  <a:solidFill>
+                    <a:srgbClr val="032F62"/>
+                  </a:solidFill>
+                  <a:latin typeface="Consolas" panose="020B0609020204030204" pitchFamily="49" charset="0"/>
+                </a:rPr>
+                <a:t>'</a:t>
+              </a:r>
+              <a:r>
+                <a:rPr lang="en-US" b="1" dirty="0">
+                  <a:solidFill>
+                    <a:srgbClr val="032F62"/>
+                  </a:solidFill>
+                  <a:effectLst>
+                    <a:outerShdw blurRad="38100" dist="38100" dir="2700000" algn="tl">
+                      <a:srgbClr val="000000">
+                        <a:alpha val="43137"/>
+                      </a:srgbClr>
+                    </a:outerShdw>
+                  </a:effectLst>
+                  <a:latin typeface="Consolas" panose="020B0609020204030204" pitchFamily="49" charset="0"/>
+                </a:rPr>
+                <a:t>E:/REPO/01.PNG</a:t>
+              </a:r>
+              <a:r>
+                <a:rPr lang="en-US" dirty="0">
+                  <a:solidFill>
+                    <a:srgbClr val="032F62"/>
+                  </a:solidFill>
+                  <a:latin typeface="Consolas" panose="020B0609020204030204" pitchFamily="49" charset="0"/>
+                </a:rPr>
+                <a:t>'</a:t>
+              </a:r>
+              <a:r>
+                <a:rPr lang="en-US" dirty="0">
+                  <a:solidFill>
+                    <a:srgbClr val="24292E"/>
+                  </a:solidFill>
+                  <a:latin typeface="Consolas" panose="020B0609020204030204" pitchFamily="49" charset="0"/>
+                </a:rPr>
+                <a:t>)</a:t>
+              </a:r>
+              <a:r>
+                <a:rPr lang="en-US" b="0" dirty="0">
+                  <a:solidFill>
+                    <a:srgbClr val="24292E"/>
+                  </a:solidFill>
+                  <a:effectLst/>
+                  <a:latin typeface="Consolas" panose="020B0609020204030204" pitchFamily="49" charset="0"/>
+                </a:rPr>
+                <a:t>) </a:t>
+              </a:r>
+            </a:p>
+            <a:p>
+              <a:pPr>
+                <a:buNone/>
+              </a:pPr>
+              <a:r>
+                <a:rPr lang="en-US" b="1" dirty="0">
+                  <a:solidFill>
+                    <a:srgbClr val="24292E"/>
+                  </a:solidFill>
+                  <a:effectLst>
+                    <a:outerShdw blurRad="38100" dist="38100" dir="2700000" algn="tl">
+                      <a:srgbClr val="000000">
+                        <a:alpha val="43137"/>
+                      </a:srgbClr>
+                    </a:outerShdw>
+                  </a:effectLst>
+                  <a:latin typeface="Consolas" panose="020B0609020204030204" pitchFamily="49" charset="0"/>
+                </a:rPr>
+                <a:t>model</a:t>
+              </a:r>
+              <a:r>
+                <a:rPr lang="en-US" b="0" dirty="0">
+                  <a:solidFill>
+                    <a:srgbClr val="24292E"/>
+                  </a:solidFill>
+                  <a:effectLst/>
+                  <a:latin typeface="Consolas" panose="020B0609020204030204" pitchFamily="49" charset="0"/>
+                </a:rPr>
+                <a:t> </a:t>
+              </a:r>
+              <a:r>
+                <a:rPr lang="en-US" b="0" dirty="0">
+                  <a:solidFill>
+                    <a:srgbClr val="D73A49"/>
+                  </a:solidFill>
+                  <a:effectLst/>
+                  <a:latin typeface="Consolas" panose="020B0609020204030204" pitchFamily="49" charset="0"/>
+                </a:rPr>
+                <a:t>= </a:t>
+              </a:r>
+              <a:r>
+                <a:rPr lang="en-US" b="0" dirty="0">
+                  <a:solidFill>
+                    <a:srgbClr val="24292E"/>
+                  </a:solidFill>
+                  <a:effectLst/>
+                  <a:latin typeface="Consolas" panose="020B0609020204030204" pitchFamily="49" charset="0"/>
+                </a:rPr>
+                <a:t>LatexOCR() 				   ; </a:t>
+              </a:r>
+              <a:r>
+                <a:rPr lang="en-US" b="0" dirty="0">
+                  <a:solidFill>
+                    <a:srgbClr val="D73A49"/>
+                  </a:solidFill>
+                  <a:effectLst/>
+                  <a:latin typeface="Consolas" panose="020B0609020204030204" pitchFamily="49" charset="0"/>
+                </a:rPr>
+                <a:t>print</a:t>
+              </a:r>
+              <a:r>
+                <a:rPr lang="en-US" b="0" dirty="0">
+                  <a:solidFill>
+                    <a:srgbClr val="24292E"/>
+                  </a:solidFill>
+                  <a:effectLst>
+                    <a:outerShdw blurRad="38100" dist="38100" dir="2700000" algn="tl">
+                      <a:srgbClr val="000000">
+                        <a:alpha val="43137"/>
+                      </a:srgbClr>
+                    </a:outerShdw>
+                  </a:effectLst>
+                  <a:latin typeface="Consolas" panose="020B0609020204030204" pitchFamily="49" charset="0"/>
+                </a:rPr>
+                <a:t>(</a:t>
+              </a:r>
+              <a:r>
+                <a:rPr lang="en-US" b="1" dirty="0">
+                  <a:solidFill>
+                    <a:srgbClr val="24292E"/>
+                  </a:solidFill>
+                  <a:effectLst>
+                    <a:outerShdw blurRad="38100" dist="38100" dir="2700000" algn="tl">
+                      <a:srgbClr val="000000">
+                        <a:alpha val="43137"/>
+                      </a:srgbClr>
+                    </a:outerShdw>
+                  </a:effectLst>
+                  <a:latin typeface="Consolas" panose="020B0609020204030204" pitchFamily="49" charset="0"/>
+                </a:rPr>
+                <a:t>model</a:t>
+              </a:r>
+              <a:r>
+                <a:rPr lang="en-US" b="0" dirty="0">
+                  <a:solidFill>
+                    <a:srgbClr val="24292E"/>
+                  </a:solidFill>
+                  <a:effectLst>
+                    <a:outerShdw blurRad="38100" dist="38100" dir="2700000" algn="tl">
+                      <a:srgbClr val="000000">
+                        <a:alpha val="43137"/>
+                      </a:srgbClr>
+                    </a:outerShdw>
+                  </a:effectLst>
+                  <a:latin typeface="Consolas" panose="020B0609020204030204" pitchFamily="49" charset="0"/>
+                </a:rPr>
+                <a:t>(</a:t>
+              </a:r>
+              <a:r>
+                <a:rPr lang="en-US" b="1" dirty="0">
+                  <a:solidFill>
+                    <a:srgbClr val="24292E"/>
+                  </a:solidFill>
+                  <a:effectLst>
+                    <a:outerShdw blurRad="38100" dist="38100" dir="2700000" algn="tl">
+                      <a:srgbClr val="000000">
+                        <a:alpha val="43137"/>
+                      </a:srgbClr>
+                    </a:outerShdw>
+                  </a:effectLst>
+                  <a:latin typeface="Consolas" panose="020B0609020204030204" pitchFamily="49" charset="0"/>
+                </a:rPr>
+                <a:t>img</a:t>
+              </a:r>
+              <a:r>
+                <a:rPr lang="en-US" b="0" dirty="0">
+                  <a:solidFill>
+                    <a:srgbClr val="24292E"/>
+                  </a:solidFill>
+                  <a:effectLst>
+                    <a:outerShdw blurRad="38100" dist="38100" dir="2700000" algn="tl">
+                      <a:srgbClr val="000000">
+                        <a:alpha val="43137"/>
+                      </a:srgbClr>
+                    </a:outerShdw>
+                  </a:effectLst>
+                  <a:latin typeface="Consolas" panose="020B0609020204030204" pitchFamily="49" charset="0"/>
+                </a:rPr>
+                <a:t>))</a:t>
+              </a:r>
+            </a:p>
+          </p:txBody>
+        </p:sp>
+        <p:sp>
+          <p:nvSpPr>
+            <p:cNvPr id="6" name="TextBox 5">
+              <a:extLst>
+                <a:ext uri="{FF2B5EF4-FFF2-40B4-BE49-F238E27FC236}">
+                  <a16:creationId xmlns:a16="http://schemas.microsoft.com/office/drawing/2014/main" id="{1278CB2D-6D0D-08E5-A49D-6EECCE90022A}"/>
+                </a:ext>
+              </a:extLst>
+            </p:cNvPr>
+            <p:cNvSpPr txBox="1"/>
+            <p:nvPr/>
+          </p:nvSpPr>
+          <p:spPr>
+            <a:xfrm>
+              <a:off x="1282266" y="5884450"/>
+              <a:ext cx="1429759" cy="461665"/>
+            </a:xfrm>
+            <a:prstGeom prst="rect">
+              <a:avLst/>
+            </a:prstGeom>
+            <a:noFill/>
+          </p:spPr>
+          <p:txBody>
+            <a:bodyPr wrap="square">
+              <a:spAutoFit/>
+            </a:bodyPr>
+            <a:lstStyle/>
+            <a:p>
+              <a:r>
+                <a:rPr lang="pt-BR" sz="2400" b="1" dirty="0">
+                  <a:solidFill>
+                    <a:srgbClr val="FF0000"/>
+                  </a:solidFill>
+                </a:rPr>
+                <a:t>RES:</a:t>
+              </a:r>
+              <a:endParaRPr lang="en-US" b="1" dirty="0">
+                <a:solidFill>
+                  <a:srgbClr val="FF0000"/>
+                </a:solidFill>
+              </a:endParaRPr>
+            </a:p>
+          </p:txBody>
+        </p:sp>
+        <p:grpSp>
+          <p:nvGrpSpPr>
+            <p:cNvPr id="15" name="Group 14">
+              <a:extLst>
+                <a:ext uri="{FF2B5EF4-FFF2-40B4-BE49-F238E27FC236}">
+                  <a16:creationId xmlns:a16="http://schemas.microsoft.com/office/drawing/2014/main" id="{8A051B33-90CE-62E3-06B7-42BBC9D357A9}"/>
+                </a:ext>
+              </a:extLst>
+            </p:cNvPr>
+            <p:cNvGrpSpPr/>
+            <p:nvPr/>
+          </p:nvGrpSpPr>
+          <p:grpSpPr>
+            <a:xfrm>
+              <a:off x="4372217" y="4351343"/>
+              <a:ext cx="2384084" cy="918838"/>
+              <a:chOff x="4372217" y="4351343"/>
+              <a:chExt cx="2384084" cy="918838"/>
+            </a:xfrm>
+          </p:grpSpPr>
+          <p:sp>
+            <p:nvSpPr>
+              <p:cNvPr id="11" name="TextBox 10">
                 <a:extLst>
                   <a:ext uri="{FF2B5EF4-FFF2-40B4-BE49-F238E27FC236}">
-                    <a16:creationId xmlns:a16="http://schemas.microsoft.com/office/drawing/2014/main" id="{A2544E92-B766-6FF1-86F4-389E2A3BF8C4}"/>
+                    <a16:creationId xmlns:a16="http://schemas.microsoft.com/office/drawing/2014/main" id="{55E355AF-88EA-5E10-A105-8998572D2E9A}"/>
                   </a:ext>
                 </a:extLst>
               </p:cNvPr>
-              <p:cNvPicPr>
-                <a:picLocks noChangeAspect="1"/>
-              </p:cNvPicPr>
+              <p:cNvSpPr txBox="1"/>
               <p:nvPr/>
-            </p:nvPicPr>
-            <p:blipFill>
-              <a:blip r:embed="rId4">
-                <a:extLst>
-                  <a:ext uri="{BEBA8EAE-BF5A-486C-A8C5-ECC9F3942E4B}">
-                    <a14:imgProps xmlns:a14="http://schemas.microsoft.com/office/drawing/2010/main">
-                      <a14:imgLayer r:embed="rId5">
-                        <a14:imgEffect>
-                          <a14:artisticTexturizer/>
-                        </a14:imgEffect>
-                      </a14:imgLayer>
-                    </a14:imgProps>
-                  </a:ext>
-                </a:extLst>
-              </a:blip>
-              <a:srcRect l="5358" t="3913" r="4219" b="19578"/>
-              <a:stretch>
-                <a:fillRect/>
-              </a:stretch>
-            </p:blipFill>
+            </p:nvSpPr>
             <p:spPr>
               <a:xfrm>
-                <a:off x="1309228" y="3959087"/>
-                <a:ext cx="2855168" cy="991516"/>
+                <a:off x="4372217" y="4351343"/>
+                <a:ext cx="2384084" cy="918838"/>
               </a:xfrm>
               <a:prstGeom prst="rect">
                 <a:avLst/>
@@ -4275,300 +5377,77 @@
                 </a:outerShdw>
               </a:effectLst>
             </p:spPr>
-          </p:pic>
-          <mc:AlternateContent xmlns:mc="http://schemas.openxmlformats.org/markup-compatibility/2006" xmlns:a14="http://schemas.microsoft.com/office/drawing/2010/main">
-            <mc:Choice Requires="a14">
-              <p:sp>
-                <p:nvSpPr>
-                  <p:cNvPr id="21" name="TextBox 20">
-                    <a:extLst>
-                      <a:ext uri="{FF2B5EF4-FFF2-40B4-BE49-F238E27FC236}">
-                        <a16:creationId xmlns:a16="http://schemas.microsoft.com/office/drawing/2014/main" id="{EEB9D3AA-61DD-D3B6-66D1-7BB9309E52FF}"/>
-                      </a:ext>
-                    </a:extLst>
-                  </p:cNvPr>
-                  <p:cNvSpPr txBox="1"/>
-                  <p:nvPr/>
-                </p:nvSpPr>
-                <p:spPr>
-                  <a:xfrm>
-                    <a:off x="7190722" y="3959086"/>
-                    <a:ext cx="2534565" cy="1111287"/>
-                  </a:xfrm>
-                  <a:prstGeom prst="rect">
-                    <a:avLst/>
-                  </a:prstGeom>
-                  <a:solidFill>
-                    <a:srgbClr val="E7E7FF"/>
-                  </a:solidFill>
-                  <a:ln>
-                    <a:solidFill>
-                      <a:schemeClr val="tx1"/>
-                    </a:solidFill>
-                  </a:ln>
+            <p:txBody>
+              <a:bodyPr wrap="square" lIns="0" tIns="0" rIns="0" bIns="0" rtlCol="0" anchor="ctr" anchorCtr="0">
+                <a:noAutofit/>
+              </a:bodyPr>
+              <a:lstStyle/>
+              <a:p>
+                <a:endParaRPr lang="LID4096" sz="3200" b="1" i="1" dirty="0">
                   <a:effectLst>
-                    <a:outerShdw blurRad="50800" dist="38100" dir="8100000" algn="tr" rotWithShape="0">
-                      <a:prstClr val="black">
-                        <a:alpha val="40000"/>
-                      </a:prstClr>
+                    <a:outerShdw blurRad="38100" dist="38100" dir="2700000" algn="tl">
+                      <a:srgbClr val="000000">
+                        <a:alpha val="43137"/>
+                      </a:srgbClr>
                     </a:outerShdw>
                   </a:effectLst>
-                </p:spPr>
-                <p:txBody>
-                  <a:bodyPr wrap="square" lIns="0" tIns="0" rIns="0" bIns="0" rtlCol="0" anchor="ctr" anchorCtr="0">
-                    <a:noAutofit/>
-                  </a:bodyPr>
-                  <a:lstStyle/>
-                  <a:p>
-                    <a:pPr/>
-                    <a14:m>
-                      <m:oMathPara xmlns:m="http://schemas.openxmlformats.org/officeDocument/2006/math">
-                        <m:oMathParaPr>
-                          <m:jc m:val="centerGroup"/>
-                        </m:oMathParaPr>
-                        <m:oMath xmlns:m="http://schemas.openxmlformats.org/officeDocument/2006/math">
-                          <m:f>
-                            <m:fPr>
-                              <m:ctrlPr>
-                                <a:rPr lang="en-US" sz="3200" b="1" i="1" smtClean="0">
-                                  <a:effectLst>
-                                    <a:outerShdw blurRad="38100" dist="38100" dir="2700000" algn="tl">
-                                      <a:srgbClr val="000000">
-                                        <a:alpha val="43137"/>
-                                      </a:srgbClr>
-                                    </a:outerShdw>
-                                  </a:effectLst>
-                                  <a:latin typeface="Cambria Math" panose="02040503050406030204" pitchFamily="18" charset="0"/>
-                                </a:rPr>
-                              </m:ctrlPr>
-                            </m:fPr>
-                            <m:num>
-                              <m:r>
-                                <a:rPr lang="en-US" sz="3200" b="1" i="1" smtClean="0">
-                                  <a:effectLst>
-                                    <a:outerShdw blurRad="38100" dist="38100" dir="2700000" algn="tl">
-                                      <a:srgbClr val="000000">
-                                        <a:alpha val="43137"/>
-                                      </a:srgbClr>
-                                    </a:outerShdw>
-                                  </a:effectLst>
-                                  <a:latin typeface="Cambria Math" panose="02040503050406030204" pitchFamily="18" charset="0"/>
-                                  <a:ea typeface="Cambria Math" panose="02040503050406030204" pitchFamily="18" charset="0"/>
-                                </a:rPr>
-                                <m:t>𝝏</m:t>
-                              </m:r>
-                              <m:r>
-                                <a:rPr lang="en-US" sz="3200" b="1" i="1" smtClean="0">
-                                  <a:effectLst>
-                                    <a:outerShdw blurRad="38100" dist="38100" dir="2700000" algn="tl">
-                                      <a:srgbClr val="000000">
-                                        <a:alpha val="43137"/>
-                                      </a:srgbClr>
-                                    </a:outerShdw>
-                                  </a:effectLst>
-                                  <a:latin typeface="Cambria Math" panose="02040503050406030204" pitchFamily="18" charset="0"/>
-                                  <a:ea typeface="Cambria Math" panose="02040503050406030204" pitchFamily="18" charset="0"/>
-                                </a:rPr>
-                                <m:t>∅</m:t>
-                              </m:r>
-                            </m:num>
-                            <m:den>
-                              <m:r>
-                                <a:rPr lang="en-US" sz="3200" b="1" i="1">
-                                  <a:effectLst>
-                                    <a:outerShdw blurRad="38100" dist="38100" dir="2700000" algn="tl">
-                                      <a:srgbClr val="000000">
-                                        <a:alpha val="43137"/>
-                                      </a:srgbClr>
-                                    </a:outerShdw>
-                                  </a:effectLst>
-                                  <a:latin typeface="Cambria Math" panose="02040503050406030204" pitchFamily="18" charset="0"/>
-                                  <a:ea typeface="Cambria Math" panose="02040503050406030204" pitchFamily="18" charset="0"/>
-                                </a:rPr>
-                                <m:t>𝝏</m:t>
-                              </m:r>
-                              <m:r>
-                                <a:rPr lang="pt-BR" sz="3200" b="1" i="1" smtClean="0">
-                                  <a:effectLst>
-                                    <a:outerShdw blurRad="38100" dist="38100" dir="2700000" algn="tl">
-                                      <a:srgbClr val="000000">
-                                        <a:alpha val="43137"/>
-                                      </a:srgbClr>
-                                    </a:outerShdw>
-                                  </a:effectLst>
-                                  <a:latin typeface="Cambria Math" panose="02040503050406030204" pitchFamily="18" charset="0"/>
-                                  <a:ea typeface="Cambria Math" panose="02040503050406030204" pitchFamily="18" charset="0"/>
-                                </a:rPr>
-                                <m:t>𝒕</m:t>
-                              </m:r>
-                            </m:den>
-                          </m:f>
-                          <m:r>
-                            <a:rPr lang="pt-BR" sz="3200" b="1" i="1" smtClean="0">
-                              <a:effectLst>
-                                <a:outerShdw blurRad="38100" dist="38100" dir="2700000" algn="tl">
-                                  <a:srgbClr val="000000">
-                                    <a:alpha val="43137"/>
-                                  </a:srgbClr>
-                                </a:outerShdw>
-                              </a:effectLst>
-                              <a:latin typeface="Cambria Math" panose="02040503050406030204" pitchFamily="18" charset="0"/>
-                            </a:rPr>
-                            <m:t>=</m:t>
-                          </m:r>
-                          <m:r>
-                            <a:rPr lang="pt-BR" sz="3200" b="1" i="1" smtClean="0">
-                              <a:effectLst>
-                                <a:outerShdw blurRad="38100" dist="38100" dir="2700000" algn="tl">
-                                  <a:srgbClr val="000000">
-                                    <a:alpha val="43137"/>
-                                  </a:srgbClr>
-                                </a:outerShdw>
-                              </a:effectLst>
-                              <a:latin typeface="Cambria Math" panose="02040503050406030204" pitchFamily="18" charset="0"/>
-                            </a:rPr>
-                            <m:t>𝑫</m:t>
-                          </m:r>
-                          <m:sSup>
-                            <m:sSupPr>
-                              <m:ctrlPr>
-                                <a:rPr lang="pt-BR" sz="3200" b="1" i="1" smtClean="0">
-                                  <a:effectLst>
-                                    <a:outerShdw blurRad="38100" dist="38100" dir="2700000" algn="tl">
-                                      <a:srgbClr val="000000">
-                                        <a:alpha val="43137"/>
-                                      </a:srgbClr>
-                                    </a:outerShdw>
-                                  </a:effectLst>
-                                  <a:latin typeface="Cambria Math" panose="02040503050406030204" pitchFamily="18" charset="0"/>
-                                </a:rPr>
-                              </m:ctrlPr>
-                            </m:sSupPr>
-                            <m:e>
-                              <m:r>
-                                <a:rPr lang="pt-BR" sz="3200" b="1" i="0" smtClean="0">
-                                  <a:effectLst>
-                                    <a:outerShdw blurRad="38100" dist="38100" dir="2700000" algn="tl">
-                                      <a:srgbClr val="000000">
-                                        <a:alpha val="43137"/>
-                                      </a:srgbClr>
-                                    </a:outerShdw>
-                                  </a:effectLst>
-                                  <a:latin typeface="Cambria Math" panose="02040503050406030204" pitchFamily="18" charset="0"/>
-                                  <a:ea typeface="Cambria Math" panose="02040503050406030204" pitchFamily="18" charset="0"/>
-                                </a:rPr>
-                                <m:t>𝛁</m:t>
-                              </m:r>
-                            </m:e>
-                            <m:sup>
-                              <m:r>
-                                <a:rPr lang="pt-BR" sz="3200" b="1" i="1" smtClean="0">
-                                  <a:effectLst>
-                                    <a:outerShdw blurRad="38100" dist="38100" dir="2700000" algn="tl">
-                                      <a:srgbClr val="000000">
-                                        <a:alpha val="43137"/>
-                                      </a:srgbClr>
-                                    </a:outerShdw>
-                                  </a:effectLst>
-                                  <a:latin typeface="Cambria Math" panose="02040503050406030204" pitchFamily="18" charset="0"/>
-                                </a:rPr>
-                                <m:t>𝟐</m:t>
-                              </m:r>
-                            </m:sup>
-                          </m:sSup>
-                          <m:r>
-                            <a:rPr lang="en-US" sz="3200" b="1" i="1">
-                              <a:effectLst>
-                                <a:outerShdw blurRad="38100" dist="38100" dir="2700000" algn="tl">
-                                  <a:srgbClr val="000000">
-                                    <a:alpha val="43137"/>
-                                  </a:srgbClr>
-                                </a:outerShdw>
-                              </a:effectLst>
-                              <a:latin typeface="Cambria Math" panose="02040503050406030204" pitchFamily="18" charset="0"/>
-                              <a:ea typeface="Cambria Math" panose="02040503050406030204" pitchFamily="18" charset="0"/>
-                            </a:rPr>
-                            <m:t>∅</m:t>
-                          </m:r>
-                        </m:oMath>
-                      </m:oMathPara>
-                    </a14:m>
-                    <a:endParaRPr lang="LID4096" sz="3200" b="1" i="1" dirty="0">
-                      <a:effectLst>
-                        <a:outerShdw blurRad="38100" dist="38100" dir="2700000" algn="tl">
-                          <a:srgbClr val="000000">
-                            <a:alpha val="43137"/>
-                          </a:srgbClr>
-                        </a:outerShdw>
-                      </a:effectLst>
-                    </a:endParaRPr>
-                  </a:p>
-                </p:txBody>
-              </p:sp>
-            </mc:Choice>
-            <mc:Fallback xmlns="">
-              <p:sp>
-                <p:nvSpPr>
-                  <p:cNvPr id="21" name="TextBox 20">
-                    <a:extLst>
-                      <a:ext uri="{FF2B5EF4-FFF2-40B4-BE49-F238E27FC236}">
-                        <a16:creationId xmlns:a16="http://schemas.microsoft.com/office/drawing/2014/main" id="{EEB9D3AA-61DD-D3B6-66D1-7BB9309E52FF}"/>
-                      </a:ext>
-                    </a:extLst>
-                  </p:cNvPr>
-                  <p:cNvSpPr txBox="1">
-                    <a:spLocks noRot="1" noChangeAspect="1" noMove="1" noResize="1" noEditPoints="1" noAdjustHandles="1" noChangeArrowheads="1" noChangeShapeType="1" noTextEdit="1"/>
-                  </p:cNvSpPr>
-                  <p:nvPr/>
-                </p:nvSpPr>
-                <p:spPr>
-                  <a:xfrm>
-                    <a:off x="7190722" y="3959086"/>
-                    <a:ext cx="2534565" cy="1111287"/>
-                  </a:xfrm>
-                  <a:prstGeom prst="rect">
-                    <a:avLst/>
-                  </a:prstGeom>
-                  <a:blipFill>
-                    <a:blip r:embed="rId6"/>
-                    <a:stretch>
-                      <a:fillRect/>
-                    </a:stretch>
-                  </a:blipFill>
-                  <a:ln>
-                    <a:solidFill>
-                      <a:schemeClr val="tx1"/>
-                    </a:solidFill>
-                  </a:ln>
-                  <a:effectLst>
-                    <a:outerShdw blurRad="50800" dist="38100" dir="8100000" algn="tr" rotWithShape="0">
-                      <a:prstClr val="black">
-                        <a:alpha val="40000"/>
-                      </a:prstClr>
-                    </a:outerShdw>
-                  </a:effectLst>
-                </p:spPr>
-                <p:txBody>
-                  <a:bodyPr/>
-                  <a:lstStyle/>
-                  <a:p>
-                    <a:r>
-                      <a:rPr lang="LID4096">
-                        <a:noFill/>
-                      </a:rPr>
-                      <a:t> </a:t>
-                    </a:r>
-                  </a:p>
-                </p:txBody>
-              </p:sp>
-            </mc:Fallback>
-          </mc:AlternateContent>
+                </a:endParaRPr>
+              </a:p>
+            </p:txBody>
+          </p:sp>
+          <p:pic>
+            <p:nvPicPr>
+              <p:cNvPr id="14" name="Picture 13">
+                <a:extLst>
+                  <a:ext uri="{FF2B5EF4-FFF2-40B4-BE49-F238E27FC236}">
+                    <a16:creationId xmlns:a16="http://schemas.microsoft.com/office/drawing/2014/main" id="{C97E7732-C692-F62D-0E41-68E22B98D001}"/>
+                  </a:ext>
+                </a:extLst>
+              </p:cNvPr>
+              <p:cNvPicPr>
+                <a:picLocks noChangeAspect="1"/>
+              </p:cNvPicPr>
+              <p:nvPr/>
+            </p:nvPicPr>
+            <p:blipFill>
+              <a:blip r:embed="rId7">
+                <a:clrChange>
+                  <a:clrFrom>
+                    <a:srgbClr val="FFFFFF"/>
+                  </a:clrFrom>
+                  <a:clrTo>
+                    <a:srgbClr val="FFFFFF">
+                      <a:alpha val="0"/>
+                    </a:srgbClr>
+                  </a:clrTo>
+                </a:clrChange>
+              </a:blip>
+              <a:srcRect l="1221" t="1811" r="3833"/>
+              <a:stretch>
+                <a:fillRect/>
+              </a:stretch>
+            </p:blipFill>
+            <p:spPr>
+              <a:xfrm>
+                <a:off x="4470289" y="4448067"/>
+                <a:ext cx="2154441" cy="776471"/>
+              </a:xfrm>
+              <a:prstGeom prst="rect">
+                <a:avLst/>
+              </a:prstGeom>
+              <a:noFill/>
+              <a:ln>
+                <a:noFill/>
+              </a:ln>
+              <a:effectLst/>
+            </p:spPr>
+          </p:pic>
           <p:sp>
             <p:nvSpPr>
-              <p:cNvPr id="22" name="TextBox 21">
+              <p:cNvPr id="3" name="TextBox 2">
                 <a:extLst>
                   <a:ext uri="{FF2B5EF4-FFF2-40B4-BE49-F238E27FC236}">
-                    <a16:creationId xmlns:a16="http://schemas.microsoft.com/office/drawing/2014/main" id="{A142396D-445C-B152-597E-8DCA03BE4ECC}"/>
+                    <a16:creationId xmlns:a16="http://schemas.microsoft.com/office/drawing/2014/main" id="{A1E61368-AF9E-D58F-BA89-49E20124ED26}"/>
                   </a:ext>
                 </a:extLst>
               </p:cNvPr>
@@ -4577,891 +5456,33 @@
             </p:nvSpPr>
             <p:spPr>
               <a:xfrm>
-                <a:off x="2063994" y="5565297"/>
-                <a:ext cx="7661293" cy="616235"/>
+                <a:off x="4429159" y="4757026"/>
+                <a:ext cx="839932" cy="404617"/>
               </a:xfrm>
               <a:prstGeom prst="rect">
                 <a:avLst/>
               </a:prstGeom>
-              <a:solidFill>
-                <a:srgbClr val="E7E7FF"/>
-              </a:solidFill>
-              <a:ln>
-                <a:solidFill>
-                  <a:schemeClr val="tx1"/>
-                </a:solidFill>
-              </a:ln>
-              <a:effectLst>
-                <a:outerShdw blurRad="50800" dist="38100" dir="8100000" algn="tr" rotWithShape="0">
-                  <a:prstClr val="black">
-                    <a:alpha val="40000"/>
-                  </a:prstClr>
-                </a:outerShdw>
-              </a:effectLst>
+              <a:noFill/>
             </p:spPr>
             <p:txBody>
-              <a:bodyPr wrap="square" anchor="ctr" anchorCtr="0">
+              <a:bodyPr wrap="square" lIns="0" tIns="0" rIns="0" bIns="0" anchor="b" anchorCtr="0">
                 <a:noAutofit/>
               </a:bodyPr>
               <a:lstStyle/>
               <a:p>
-                <a:pPr algn="ctr">
-                  <a:buNone/>
-                </a:pPr>
                 <a:r>
-                  <a:rPr lang="en-US" sz="2000" b="1" dirty="0">
+                  <a:rPr lang="pt-BR" sz="4000" b="1" dirty="0">
                     <a:solidFill>
-                      <a:srgbClr val="D73A49"/>
+                      <a:srgbClr val="FF0000"/>
                     </a:solidFill>
-                    <a:effectLst/>
-                    <a:latin typeface="Consolas" panose="020B0609020204030204" pitchFamily="49" charset="0"/>
+                    <a:latin typeface="Horley Old Style"/>
                   </a:rPr>
-                  <a:t>\</a:t>
+                  <a:t>___</a:t>
                 </a:r>
-                <a:r>
-                  <a:rPr lang="en-US" sz="2000" b="1" dirty="0">
-                    <a:solidFill>
-                      <a:srgbClr val="6F42C1"/>
-                    </a:solidFill>
-                    <a:effectLst/>
-                    <a:latin typeface="Consolas" panose="020B0609020204030204" pitchFamily="49" charset="0"/>
-                  </a:rPr>
-                  <a:t>frac </a:t>
-                </a:r>
-                <a:r>
-                  <a:rPr lang="en-US" sz="2000" b="1" dirty="0">
-                    <a:solidFill>
-                      <a:srgbClr val="24292E"/>
-                    </a:solidFill>
-                    <a:effectLst/>
-                    <a:latin typeface="Consolas" panose="020B0609020204030204" pitchFamily="49" charset="0"/>
-                  </a:rPr>
-                  <a:t>{</a:t>
-                </a:r>
-                <a:r>
-                  <a:rPr lang="en-US" sz="2000" b="1" dirty="0">
-                    <a:solidFill>
-                      <a:srgbClr val="005CC5"/>
-                    </a:solidFill>
-                    <a:effectLst/>
-                    <a:latin typeface="Consolas" panose="020B0609020204030204" pitchFamily="49" charset="0"/>
-                  </a:rPr>
-                  <a:t>\partial\phi</a:t>
-                </a:r>
-                <a:r>
-                  <a:rPr lang="en-US" sz="2000" b="1" dirty="0">
-                    <a:solidFill>
-                      <a:srgbClr val="24292E"/>
-                    </a:solidFill>
-                    <a:effectLst/>
-                    <a:latin typeface="Consolas" panose="020B0609020204030204" pitchFamily="49" charset="0"/>
-                  </a:rPr>
-                  <a:t>} {</a:t>
-                </a:r>
-                <a:r>
-                  <a:rPr lang="en-US" sz="2000" b="1" dirty="0">
-                    <a:solidFill>
-                      <a:srgbClr val="005CC5"/>
-                    </a:solidFill>
-                    <a:effectLst/>
-                    <a:latin typeface="Consolas" panose="020B0609020204030204" pitchFamily="49" charset="0"/>
-                  </a:rPr>
-                  <a:t>\partial </a:t>
-                </a:r>
-                <a:r>
-                  <a:rPr lang="en-US" sz="2000" b="1" dirty="0">
-                    <a:solidFill>
-                      <a:srgbClr val="24292E"/>
-                    </a:solidFill>
-                    <a:effectLst/>
-                    <a:latin typeface="Consolas" panose="020B0609020204030204" pitchFamily="49" charset="0"/>
-                  </a:rPr>
-                  <a:t>t} = D </a:t>
-                </a:r>
-                <a:r>
-                  <a:rPr lang="en-US" sz="2000" b="1" dirty="0">
-                    <a:solidFill>
-                      <a:srgbClr val="005CC5"/>
-                    </a:solidFill>
-                    <a:effectLst/>
-                    <a:latin typeface="Consolas" panose="020B0609020204030204" pitchFamily="49" charset="0"/>
-                  </a:rPr>
-                  <a:t>\nabla</a:t>
-                </a:r>
-                <a:r>
-                  <a:rPr lang="en-US" sz="2000" b="1" dirty="0">
-                    <a:solidFill>
-                      <a:srgbClr val="24292E"/>
-                    </a:solidFill>
-                    <a:effectLst/>
-                    <a:latin typeface="Consolas" panose="020B0609020204030204" pitchFamily="49" charset="0"/>
-                  </a:rPr>
-                  <a:t>^</a:t>
-                </a:r>
-                <a:r>
-                  <a:rPr lang="en-US" sz="2000" b="1" dirty="0">
-                    <a:solidFill>
-                      <a:srgbClr val="005CC5"/>
-                    </a:solidFill>
-                    <a:effectLst/>
-                    <a:latin typeface="Consolas" panose="020B0609020204030204" pitchFamily="49" charset="0"/>
-                  </a:rPr>
-                  <a:t>2 \phi</a:t>
-                </a:r>
-                <a:endParaRPr lang="en-US" sz="2000" b="1" dirty="0">
-                  <a:solidFill>
-                    <a:srgbClr val="24292E"/>
-                  </a:solidFill>
-                  <a:effectLst/>
-                  <a:latin typeface="Consolas" panose="020B0609020204030204" pitchFamily="49" charset="0"/>
-                </a:endParaRPr>
-              </a:p>
-            </p:txBody>
-          </p:sp>
-          <p:sp>
-            <p:nvSpPr>
-              <p:cNvPr id="23" name="Arrow: Right 22">
-                <a:extLst>
-                  <a:ext uri="{FF2B5EF4-FFF2-40B4-BE49-F238E27FC236}">
-                    <a16:creationId xmlns:a16="http://schemas.microsoft.com/office/drawing/2014/main" id="{441FCC32-94B3-0490-7686-8397979F3ABB}"/>
-                  </a:ext>
-                </a:extLst>
-              </p:cNvPr>
-              <p:cNvSpPr/>
-              <p:nvPr/>
-            </p:nvSpPr>
-            <p:spPr>
-              <a:xfrm rot="2162833">
-                <a:off x="3985028" y="5057799"/>
-                <a:ext cx="317578" cy="389449"/>
-              </a:xfrm>
-              <a:prstGeom prst="rightArrow">
-                <a:avLst/>
-              </a:prstGeom>
-              <a:solidFill>
-                <a:srgbClr val="0000FF"/>
-              </a:solidFill>
-              <a:effectLst>
-                <a:outerShdw blurRad="50800" dist="38100" dir="8100000" algn="tr" rotWithShape="0">
-                  <a:prstClr val="black">
-                    <a:alpha val="40000"/>
-                  </a:prstClr>
-                </a:outerShdw>
-              </a:effectLst>
-            </p:spPr>
-            <p:style>
-              <a:lnRef idx="2">
-                <a:schemeClr val="accent1">
-                  <a:shade val="15000"/>
-                </a:schemeClr>
-              </a:lnRef>
-              <a:fillRef idx="1">
-                <a:schemeClr val="accent1"/>
-              </a:fillRef>
-              <a:effectRef idx="0">
-                <a:schemeClr val="accent1"/>
-              </a:effectRef>
-              <a:fontRef idx="minor">
-                <a:schemeClr val="lt1"/>
-              </a:fontRef>
-            </p:style>
-            <p:txBody>
-              <a:bodyPr rtlCol="0" anchor="ctr"/>
-              <a:lstStyle/>
-              <a:p>
-                <a:pPr algn="ctr"/>
-                <a:endParaRPr lang="LID4096" dirty="0"/>
-              </a:p>
-            </p:txBody>
-          </p:sp>
-          <p:sp>
-            <p:nvSpPr>
-              <p:cNvPr id="24" name="Arrow: Right 23">
-                <a:extLst>
-                  <a:ext uri="{FF2B5EF4-FFF2-40B4-BE49-F238E27FC236}">
-                    <a16:creationId xmlns:a16="http://schemas.microsoft.com/office/drawing/2014/main" id="{8EC1D28D-75BC-1207-5C63-1FF25EE80232}"/>
-                  </a:ext>
-                </a:extLst>
-              </p:cNvPr>
-              <p:cNvSpPr/>
-              <p:nvPr/>
-            </p:nvSpPr>
-            <p:spPr>
-              <a:xfrm rot="19808280">
-                <a:off x="6816045" y="5003558"/>
-                <a:ext cx="317578" cy="389449"/>
-              </a:xfrm>
-              <a:prstGeom prst="rightArrow">
-                <a:avLst/>
-              </a:prstGeom>
-              <a:solidFill>
-                <a:srgbClr val="0000FF"/>
-              </a:solidFill>
-              <a:effectLst>
-                <a:outerShdw blurRad="50800" dist="38100" dir="8100000" algn="tr" rotWithShape="0">
-                  <a:prstClr val="black">
-                    <a:alpha val="40000"/>
-                  </a:prstClr>
-                </a:outerShdw>
-              </a:effectLst>
-            </p:spPr>
-            <p:style>
-              <a:lnRef idx="2">
-                <a:schemeClr val="accent1">
-                  <a:shade val="15000"/>
-                </a:schemeClr>
-              </a:lnRef>
-              <a:fillRef idx="1">
-                <a:schemeClr val="accent1"/>
-              </a:fillRef>
-              <a:effectRef idx="0">
-                <a:schemeClr val="accent1"/>
-              </a:effectRef>
-              <a:fontRef idx="minor">
-                <a:schemeClr val="lt1"/>
-              </a:fontRef>
-            </p:style>
-            <p:txBody>
-              <a:bodyPr rtlCol="0" anchor="ctr"/>
-              <a:lstStyle/>
-              <a:p>
-                <a:pPr algn="ctr"/>
-                <a:endParaRPr lang="LID4096" dirty="0"/>
               </a:p>
             </p:txBody>
           </p:sp>
         </p:grpSp>
-        <p:sp>
-          <p:nvSpPr>
-            <p:cNvPr id="34" name="TextBox 33">
-              <a:extLst>
-                <a:ext uri="{FF2B5EF4-FFF2-40B4-BE49-F238E27FC236}">
-                  <a16:creationId xmlns:a16="http://schemas.microsoft.com/office/drawing/2014/main" id="{D44DD562-985A-8937-8F19-F8C2BF3194D4}"/>
-                </a:ext>
-              </a:extLst>
-            </p:cNvPr>
-            <p:cNvSpPr txBox="1"/>
-            <p:nvPr/>
-          </p:nvSpPr>
-          <p:spPr>
-            <a:xfrm>
-              <a:off x="1781191" y="5480799"/>
-              <a:ext cx="1826286" cy="430887"/>
-            </a:xfrm>
-            <a:prstGeom prst="rect">
-              <a:avLst/>
-            </a:prstGeom>
-            <a:noFill/>
-          </p:spPr>
-          <p:txBody>
-            <a:bodyPr wrap="square">
-              <a:spAutoFit/>
-            </a:bodyPr>
-            <a:lstStyle/>
-            <a:p>
-              <a:pPr algn="r"/>
-              <a:r>
-                <a:rPr lang="pt-BR" sz="2200" b="1" dirty="0">
-                  <a:solidFill>
-                    <a:srgbClr val="FF0000"/>
-                  </a:solidFill>
-                </a:rPr>
-                <a:t>.. predição</a:t>
-              </a:r>
-              <a:endParaRPr lang="en-US" sz="2200" b="1" dirty="0">
-                <a:solidFill>
-                  <a:srgbClr val="FF0000"/>
-                </a:solidFill>
-              </a:endParaRPr>
-            </a:p>
-          </p:txBody>
-        </p:sp>
-        <p:sp>
-          <p:nvSpPr>
-            <p:cNvPr id="35" name="TextBox 34">
-              <a:extLst>
-                <a:ext uri="{FF2B5EF4-FFF2-40B4-BE49-F238E27FC236}">
-                  <a16:creationId xmlns:a16="http://schemas.microsoft.com/office/drawing/2014/main" id="{13661CDB-ECDB-730C-CC85-4898BA726687}"/>
-                </a:ext>
-              </a:extLst>
-            </p:cNvPr>
-            <p:cNvSpPr txBox="1"/>
-            <p:nvPr/>
-          </p:nvSpPr>
-          <p:spPr>
-            <a:xfrm>
-              <a:off x="6981415" y="5473318"/>
-              <a:ext cx="2366493" cy="430887"/>
-            </a:xfrm>
-            <a:prstGeom prst="rect">
-              <a:avLst/>
-            </a:prstGeom>
-            <a:noFill/>
-          </p:spPr>
-          <p:txBody>
-            <a:bodyPr wrap="square">
-              <a:spAutoFit/>
-            </a:bodyPr>
-            <a:lstStyle/>
-            <a:p>
-              <a:r>
-                <a:rPr lang="pt-BR" sz="2200" b="1" dirty="0">
-                  <a:solidFill>
-                    <a:srgbClr val="FF0000"/>
-                  </a:solidFill>
-                </a:rPr>
-                <a:t>.. renderização</a:t>
-              </a:r>
-              <a:endParaRPr lang="en-US" sz="2200" b="1" dirty="0">
-                <a:solidFill>
-                  <a:srgbClr val="FF0000"/>
-                </a:solidFill>
-              </a:endParaRPr>
-            </a:p>
-          </p:txBody>
-        </p:sp>
-      </p:grpSp>
-      <p:sp>
-        <p:nvSpPr>
-          <p:cNvPr id="37" name="TextBox 36">
-            <a:extLst>
-              <a:ext uri="{FF2B5EF4-FFF2-40B4-BE49-F238E27FC236}">
-                <a16:creationId xmlns:a16="http://schemas.microsoft.com/office/drawing/2014/main" id="{773B681C-E1F4-D5EE-DE1F-CE0DA1AF95C6}"/>
-              </a:ext>
-            </a:extLst>
-          </p:cNvPr>
-          <p:cNvSpPr txBox="1"/>
-          <p:nvPr/>
-        </p:nvSpPr>
-        <p:spPr>
-          <a:xfrm>
-            <a:off x="1196975" y="3157492"/>
-            <a:ext cx="8680355" cy="790791"/>
-          </a:xfrm>
-          <a:prstGeom prst="rect">
-            <a:avLst/>
-          </a:prstGeom>
-          <a:solidFill>
-            <a:srgbClr val="E7E7FF"/>
-          </a:solidFill>
-          <a:ln>
-            <a:solidFill>
-              <a:schemeClr val="tx1"/>
-            </a:solidFill>
-          </a:ln>
-          <a:effectLst>
-            <a:outerShdw blurRad="50800" dist="38100" dir="8100000" algn="tr" rotWithShape="0">
-              <a:prstClr val="black">
-                <a:alpha val="40000"/>
-              </a:prstClr>
-            </a:outerShdw>
-          </a:effectLst>
-        </p:spPr>
-        <p:txBody>
-          <a:bodyPr wrap="square" anchor="ctr" anchorCtr="0">
-            <a:noAutofit/>
-          </a:bodyPr>
-          <a:lstStyle/>
-          <a:p>
-            <a:pPr>
-              <a:buNone/>
-            </a:pPr>
-            <a:r>
-              <a:rPr lang="en-US" b="1" dirty="0">
-                <a:solidFill>
-                  <a:srgbClr val="24292E"/>
-                </a:solidFill>
-                <a:effectLst>
-                  <a:outerShdw blurRad="38100" dist="38100" dir="2700000" algn="tl">
-                    <a:srgbClr val="000000">
-                      <a:alpha val="43137"/>
-                    </a:srgbClr>
-                  </a:outerShdw>
-                </a:effectLst>
-                <a:latin typeface="Consolas" panose="020B0609020204030204" pitchFamily="49" charset="0"/>
-              </a:rPr>
-              <a:t>img  </a:t>
-            </a:r>
-            <a:r>
-              <a:rPr lang="en-US" b="0" dirty="0">
-                <a:solidFill>
-                  <a:srgbClr val="24292E"/>
-                </a:solidFill>
-                <a:effectLst/>
-                <a:latin typeface="Consolas" panose="020B0609020204030204" pitchFamily="49" charset="0"/>
-              </a:rPr>
-              <a:t> </a:t>
-            </a:r>
-            <a:r>
-              <a:rPr lang="en-US" b="0" dirty="0">
-                <a:solidFill>
-                  <a:srgbClr val="D73A49"/>
-                </a:solidFill>
-                <a:effectLst/>
-                <a:latin typeface="Consolas" panose="020B0609020204030204" pitchFamily="49" charset="0"/>
-              </a:rPr>
-              <a:t>= </a:t>
-            </a:r>
-            <a:r>
-              <a:rPr lang="en-US" b="0" dirty="0">
-                <a:solidFill>
-                  <a:srgbClr val="005CC5"/>
-                </a:solidFill>
-                <a:effectLst/>
-                <a:latin typeface="Consolas" panose="020B0609020204030204" pitchFamily="49" charset="0"/>
-              </a:rPr>
-              <a:t>Image</a:t>
-            </a:r>
-            <a:r>
-              <a:rPr lang="en-US" b="0" dirty="0">
-                <a:solidFill>
-                  <a:srgbClr val="24292E"/>
-                </a:solidFill>
-                <a:effectLst/>
-                <a:latin typeface="Consolas" panose="020B0609020204030204" pitchFamily="49" charset="0"/>
-              </a:rPr>
-              <a:t>.</a:t>
-            </a:r>
-            <a:r>
-              <a:rPr lang="en-US" b="0" dirty="0">
-                <a:solidFill>
-                  <a:srgbClr val="005CC5"/>
-                </a:solidFill>
-                <a:effectLst/>
-                <a:latin typeface="Consolas" panose="020B0609020204030204" pitchFamily="49" charset="0"/>
-              </a:rPr>
-              <a:t>open</a:t>
-            </a:r>
-            <a:r>
-              <a:rPr lang="en-US" b="0" dirty="0">
-                <a:solidFill>
-                  <a:srgbClr val="24292E"/>
-                </a:solidFill>
-                <a:effectLst/>
-                <a:latin typeface="Consolas" panose="020B0609020204030204" pitchFamily="49" charset="0"/>
-              </a:rPr>
-              <a:t>(</a:t>
-            </a:r>
-            <a:r>
-              <a:rPr lang="en-US" dirty="0">
-                <a:solidFill>
-                  <a:srgbClr val="D73A49"/>
-                </a:solidFill>
-                <a:latin typeface="Consolas" panose="020B0609020204030204" pitchFamily="49" charset="0"/>
-              </a:rPr>
-              <a:t>Path</a:t>
-            </a:r>
-            <a:r>
-              <a:rPr lang="en-US" dirty="0">
-                <a:solidFill>
-                  <a:srgbClr val="24292E"/>
-                </a:solidFill>
-                <a:latin typeface="Consolas" panose="020B0609020204030204" pitchFamily="49" charset="0"/>
-              </a:rPr>
-              <a:t>(</a:t>
-            </a:r>
-            <a:r>
-              <a:rPr lang="en-US" dirty="0">
-                <a:solidFill>
-                  <a:srgbClr val="032F62"/>
-                </a:solidFill>
-                <a:latin typeface="Consolas" panose="020B0609020204030204" pitchFamily="49" charset="0"/>
-              </a:rPr>
-              <a:t>'</a:t>
-            </a:r>
-            <a:r>
-              <a:rPr lang="en-US" b="1" dirty="0">
-                <a:solidFill>
-                  <a:srgbClr val="032F62"/>
-                </a:solidFill>
-                <a:effectLst>
-                  <a:outerShdw blurRad="38100" dist="38100" dir="2700000" algn="tl">
-                    <a:srgbClr val="000000">
-                      <a:alpha val="43137"/>
-                    </a:srgbClr>
-                  </a:outerShdw>
-                </a:effectLst>
-                <a:latin typeface="Consolas" panose="020B0609020204030204" pitchFamily="49" charset="0"/>
-              </a:rPr>
-              <a:t>E:/REPO/01.PNG</a:t>
-            </a:r>
-            <a:r>
-              <a:rPr lang="en-US" dirty="0">
-                <a:solidFill>
-                  <a:srgbClr val="032F62"/>
-                </a:solidFill>
-                <a:latin typeface="Consolas" panose="020B0609020204030204" pitchFamily="49" charset="0"/>
-              </a:rPr>
-              <a:t>'</a:t>
-            </a:r>
-            <a:r>
-              <a:rPr lang="en-US" dirty="0">
-                <a:solidFill>
-                  <a:srgbClr val="24292E"/>
-                </a:solidFill>
-                <a:latin typeface="Consolas" panose="020B0609020204030204" pitchFamily="49" charset="0"/>
-              </a:rPr>
-              <a:t>)</a:t>
-            </a:r>
-            <a:r>
-              <a:rPr lang="en-US" b="0" dirty="0">
-                <a:solidFill>
-                  <a:srgbClr val="24292E"/>
-                </a:solidFill>
-                <a:effectLst/>
-                <a:latin typeface="Consolas" panose="020B0609020204030204" pitchFamily="49" charset="0"/>
-              </a:rPr>
-              <a:t>) </a:t>
-            </a:r>
-          </a:p>
-          <a:p>
-            <a:pPr>
-              <a:buNone/>
-            </a:pPr>
-            <a:r>
-              <a:rPr lang="en-US" b="1" dirty="0">
-                <a:solidFill>
-                  <a:srgbClr val="24292E"/>
-                </a:solidFill>
-                <a:effectLst>
-                  <a:outerShdw blurRad="38100" dist="38100" dir="2700000" algn="tl">
-                    <a:srgbClr val="000000">
-                      <a:alpha val="43137"/>
-                    </a:srgbClr>
-                  </a:outerShdw>
-                </a:effectLst>
-                <a:latin typeface="Consolas" panose="020B0609020204030204" pitchFamily="49" charset="0"/>
-              </a:rPr>
-              <a:t>model</a:t>
-            </a:r>
-            <a:r>
-              <a:rPr lang="en-US" b="0" dirty="0">
-                <a:solidFill>
-                  <a:srgbClr val="24292E"/>
-                </a:solidFill>
-                <a:effectLst/>
-                <a:latin typeface="Consolas" panose="020B0609020204030204" pitchFamily="49" charset="0"/>
-              </a:rPr>
-              <a:t> </a:t>
-            </a:r>
-            <a:r>
-              <a:rPr lang="en-US" b="0" dirty="0">
-                <a:solidFill>
-                  <a:srgbClr val="D73A49"/>
-                </a:solidFill>
-                <a:effectLst/>
-                <a:latin typeface="Consolas" panose="020B0609020204030204" pitchFamily="49" charset="0"/>
-              </a:rPr>
-              <a:t>= </a:t>
-            </a:r>
-            <a:r>
-              <a:rPr lang="en-US" b="0" dirty="0">
-                <a:solidFill>
-                  <a:srgbClr val="24292E"/>
-                </a:solidFill>
-                <a:effectLst/>
-                <a:latin typeface="Consolas" panose="020B0609020204030204" pitchFamily="49" charset="0"/>
-              </a:rPr>
-              <a:t>LatexOCR() 				   ; </a:t>
-            </a:r>
-            <a:r>
-              <a:rPr lang="en-US" b="0" dirty="0">
-                <a:solidFill>
-                  <a:srgbClr val="D73A49"/>
-                </a:solidFill>
-                <a:effectLst/>
-                <a:latin typeface="Consolas" panose="020B0609020204030204" pitchFamily="49" charset="0"/>
-              </a:rPr>
-              <a:t>print</a:t>
-            </a:r>
-            <a:r>
-              <a:rPr lang="en-US" b="0" dirty="0">
-                <a:solidFill>
-                  <a:srgbClr val="24292E"/>
-                </a:solidFill>
-                <a:effectLst>
-                  <a:outerShdw blurRad="38100" dist="38100" dir="2700000" algn="tl">
-                    <a:srgbClr val="000000">
-                      <a:alpha val="43137"/>
-                    </a:srgbClr>
-                  </a:outerShdw>
-                </a:effectLst>
-                <a:latin typeface="Consolas" panose="020B0609020204030204" pitchFamily="49" charset="0"/>
-              </a:rPr>
-              <a:t>(</a:t>
-            </a:r>
-            <a:r>
-              <a:rPr lang="en-US" b="1" dirty="0">
-                <a:solidFill>
-                  <a:srgbClr val="24292E"/>
-                </a:solidFill>
-                <a:effectLst>
-                  <a:outerShdw blurRad="38100" dist="38100" dir="2700000" algn="tl">
-                    <a:srgbClr val="000000">
-                      <a:alpha val="43137"/>
-                    </a:srgbClr>
-                  </a:outerShdw>
-                </a:effectLst>
-                <a:latin typeface="Consolas" panose="020B0609020204030204" pitchFamily="49" charset="0"/>
-              </a:rPr>
-              <a:t>model</a:t>
-            </a:r>
-            <a:r>
-              <a:rPr lang="en-US" b="0" dirty="0">
-                <a:solidFill>
-                  <a:srgbClr val="24292E"/>
-                </a:solidFill>
-                <a:effectLst>
-                  <a:outerShdw blurRad="38100" dist="38100" dir="2700000" algn="tl">
-                    <a:srgbClr val="000000">
-                      <a:alpha val="43137"/>
-                    </a:srgbClr>
-                  </a:outerShdw>
-                </a:effectLst>
-                <a:latin typeface="Consolas" panose="020B0609020204030204" pitchFamily="49" charset="0"/>
-              </a:rPr>
-              <a:t>(</a:t>
-            </a:r>
-            <a:r>
-              <a:rPr lang="en-US" b="1" dirty="0">
-                <a:solidFill>
-                  <a:srgbClr val="24292E"/>
-                </a:solidFill>
-                <a:effectLst>
-                  <a:outerShdw blurRad="38100" dist="38100" dir="2700000" algn="tl">
-                    <a:srgbClr val="000000">
-                      <a:alpha val="43137"/>
-                    </a:srgbClr>
-                  </a:outerShdw>
-                </a:effectLst>
-                <a:latin typeface="Consolas" panose="020B0609020204030204" pitchFamily="49" charset="0"/>
-              </a:rPr>
-              <a:t>img</a:t>
-            </a:r>
-            <a:r>
-              <a:rPr lang="en-US" b="0" dirty="0">
-                <a:solidFill>
-                  <a:srgbClr val="24292E"/>
-                </a:solidFill>
-                <a:effectLst>
-                  <a:outerShdw blurRad="38100" dist="38100" dir="2700000" algn="tl">
-                    <a:srgbClr val="000000">
-                      <a:alpha val="43137"/>
-                    </a:srgbClr>
-                  </a:outerShdw>
-                </a:effectLst>
-                <a:latin typeface="Consolas" panose="020B0609020204030204" pitchFamily="49" charset="0"/>
-              </a:rPr>
-              <a:t>))</a:t>
-            </a:r>
-          </a:p>
-        </p:txBody>
-      </p:sp>
-      <p:sp>
-        <p:nvSpPr>
-          <p:cNvPr id="6" name="TextBox 5">
-            <a:extLst>
-              <a:ext uri="{FF2B5EF4-FFF2-40B4-BE49-F238E27FC236}">
-                <a16:creationId xmlns:a16="http://schemas.microsoft.com/office/drawing/2014/main" id="{1278CB2D-6D0D-08E5-A49D-6EECCE90022A}"/>
-              </a:ext>
-            </a:extLst>
-          </p:cNvPr>
-          <p:cNvSpPr txBox="1"/>
-          <p:nvPr/>
-        </p:nvSpPr>
-        <p:spPr>
-          <a:xfrm>
-            <a:off x="1282266" y="5884450"/>
-            <a:ext cx="1429759" cy="461665"/>
-          </a:xfrm>
-          <a:prstGeom prst="rect">
-            <a:avLst/>
-          </a:prstGeom>
-          <a:noFill/>
-        </p:spPr>
-        <p:txBody>
-          <a:bodyPr wrap="square">
-            <a:spAutoFit/>
-          </a:bodyPr>
-          <a:lstStyle/>
-          <a:p>
-            <a:r>
-              <a:rPr lang="pt-BR" sz="2400" b="1" dirty="0">
-                <a:solidFill>
-                  <a:srgbClr val="FF0000"/>
-                </a:solidFill>
-              </a:rPr>
-              <a:t>RES:</a:t>
-            </a:r>
-            <a:endParaRPr lang="en-US" b="1" dirty="0">
-              <a:solidFill>
-                <a:srgbClr val="FF0000"/>
-              </a:solidFill>
-            </a:endParaRPr>
-          </a:p>
-        </p:txBody>
-      </p:sp>
-      <p:grpSp>
-        <p:nvGrpSpPr>
-          <p:cNvPr id="15" name="Group 14">
-            <a:extLst>
-              <a:ext uri="{FF2B5EF4-FFF2-40B4-BE49-F238E27FC236}">
-                <a16:creationId xmlns:a16="http://schemas.microsoft.com/office/drawing/2014/main" id="{8A051B33-90CE-62E3-06B7-42BBC9D357A9}"/>
-              </a:ext>
-            </a:extLst>
-          </p:cNvPr>
-          <p:cNvGrpSpPr/>
-          <p:nvPr/>
-        </p:nvGrpSpPr>
-        <p:grpSpPr>
-          <a:xfrm>
-            <a:off x="4372217" y="4351343"/>
-            <a:ext cx="2384084" cy="918838"/>
-            <a:chOff x="4372217" y="4351343"/>
-            <a:chExt cx="2384084" cy="918838"/>
-          </a:xfrm>
-        </p:grpSpPr>
-        <p:sp>
-          <p:nvSpPr>
-            <p:cNvPr id="11" name="TextBox 10">
-              <a:extLst>
-                <a:ext uri="{FF2B5EF4-FFF2-40B4-BE49-F238E27FC236}">
-                  <a16:creationId xmlns:a16="http://schemas.microsoft.com/office/drawing/2014/main" id="{55E355AF-88EA-5E10-A105-8998572D2E9A}"/>
-                </a:ext>
-              </a:extLst>
-            </p:cNvPr>
-            <p:cNvSpPr txBox="1"/>
-            <p:nvPr/>
-          </p:nvSpPr>
-          <p:spPr>
-            <a:xfrm>
-              <a:off x="4372217" y="4351343"/>
-              <a:ext cx="2384084" cy="918838"/>
-            </a:xfrm>
-            <a:prstGeom prst="rect">
-              <a:avLst/>
-            </a:prstGeom>
-            <a:solidFill>
-              <a:schemeClr val="bg1"/>
-            </a:solidFill>
-            <a:ln>
-              <a:solidFill>
-                <a:schemeClr val="tx1"/>
-              </a:solidFill>
-            </a:ln>
-            <a:effectLst>
-              <a:outerShdw blurRad="50800" dist="38100" dir="8100000" algn="tr" rotWithShape="0">
-                <a:prstClr val="black">
-                  <a:alpha val="40000"/>
-                </a:prstClr>
-              </a:outerShdw>
-            </a:effectLst>
-          </p:spPr>
-          <p:txBody>
-            <a:bodyPr wrap="square" lIns="0" tIns="0" rIns="0" bIns="0" rtlCol="0" anchor="ctr" anchorCtr="0">
-              <a:noAutofit/>
-            </a:bodyPr>
-            <a:lstStyle/>
-            <a:p>
-              <a:endParaRPr lang="LID4096" sz="3200" b="1" i="1" dirty="0">
-                <a:effectLst>
-                  <a:outerShdw blurRad="38100" dist="38100" dir="2700000" algn="tl">
-                    <a:srgbClr val="000000">
-                      <a:alpha val="43137"/>
-                    </a:srgbClr>
-                  </a:outerShdw>
-                </a:effectLst>
-              </a:endParaRPr>
-            </a:p>
-          </p:txBody>
-        </p:sp>
-        <p:pic>
-          <p:nvPicPr>
-            <p:cNvPr id="14" name="Picture 13">
-              <a:extLst>
-                <a:ext uri="{FF2B5EF4-FFF2-40B4-BE49-F238E27FC236}">
-                  <a16:creationId xmlns:a16="http://schemas.microsoft.com/office/drawing/2014/main" id="{C97E7732-C692-F62D-0E41-68E22B98D001}"/>
-                </a:ext>
-              </a:extLst>
-            </p:cNvPr>
-            <p:cNvPicPr>
-              <a:picLocks noChangeAspect="1"/>
-            </p:cNvPicPr>
-            <p:nvPr/>
-          </p:nvPicPr>
-          <p:blipFill>
-            <a:blip r:embed="rId7">
-              <a:clrChange>
-                <a:clrFrom>
-                  <a:srgbClr val="FFFFFF"/>
-                </a:clrFrom>
-                <a:clrTo>
-                  <a:srgbClr val="FFFFFF">
-                    <a:alpha val="0"/>
-                  </a:srgbClr>
-                </a:clrTo>
-              </a:clrChange>
-            </a:blip>
-            <a:srcRect l="1221" t="1811" r="3833"/>
-            <a:stretch>
-              <a:fillRect/>
-            </a:stretch>
-          </p:blipFill>
-          <p:spPr>
-            <a:xfrm>
-              <a:off x="4470289" y="4448067"/>
-              <a:ext cx="2154441" cy="776471"/>
-            </a:xfrm>
-            <a:prstGeom prst="rect">
-              <a:avLst/>
-            </a:prstGeom>
-            <a:noFill/>
-            <a:ln>
-              <a:noFill/>
-            </a:ln>
-            <a:effectLst/>
-          </p:spPr>
-        </p:pic>
-        <p:sp>
-          <p:nvSpPr>
-            <p:cNvPr id="3" name="TextBox 2">
-              <a:extLst>
-                <a:ext uri="{FF2B5EF4-FFF2-40B4-BE49-F238E27FC236}">
-                  <a16:creationId xmlns:a16="http://schemas.microsoft.com/office/drawing/2014/main" id="{A1E61368-AF9E-D58F-BA89-49E20124ED26}"/>
-                </a:ext>
-              </a:extLst>
-            </p:cNvPr>
-            <p:cNvSpPr txBox="1"/>
-            <p:nvPr/>
-          </p:nvSpPr>
-          <p:spPr>
-            <a:xfrm>
-              <a:off x="4429159" y="4757026"/>
-              <a:ext cx="839932" cy="404617"/>
-            </a:xfrm>
-            <a:prstGeom prst="rect">
-              <a:avLst/>
-            </a:prstGeom>
-            <a:noFill/>
-          </p:spPr>
-          <p:txBody>
-            <a:bodyPr wrap="square" lIns="0" tIns="0" rIns="0" bIns="0" anchor="b" anchorCtr="0">
-              <a:noAutofit/>
-            </a:bodyPr>
-            <a:lstStyle/>
-            <a:p>
-              <a:r>
-                <a:rPr lang="pt-BR" sz="4000" b="1" dirty="0">
-                  <a:solidFill>
-                    <a:srgbClr val="FF0000"/>
-                  </a:solidFill>
-                  <a:latin typeface="Horley Old Style"/>
-                </a:rPr>
-                <a:t>___</a:t>
-              </a:r>
-            </a:p>
-          </p:txBody>
-        </p:sp>
       </p:grpSp>
     </p:spTree>
     <p:extLst>
@@ -5493,6 +5514,332 @@
           <a:chExt cx="0" cy="0"/>
         </a:xfrm>
       </p:grpSpPr>
+      <p:sp>
+        <p:nvSpPr>
+          <p:cNvPr id="4" name="TextBox 3">
+            <a:extLst>
+              <a:ext uri="{FF2B5EF4-FFF2-40B4-BE49-F238E27FC236}">
+                <a16:creationId xmlns:a16="http://schemas.microsoft.com/office/drawing/2014/main" id="{949EA81F-B4DF-F143-0DE4-65020C769521}"/>
+              </a:ext>
+            </a:extLst>
+          </p:cNvPr>
+          <p:cNvSpPr txBox="1"/>
+          <p:nvPr/>
+        </p:nvSpPr>
+        <p:spPr>
+          <a:xfrm>
+            <a:off x="679010" y="386142"/>
+            <a:ext cx="10829339" cy="1324963"/>
+          </a:xfrm>
+          <a:prstGeom prst="rect">
+            <a:avLst/>
+          </a:prstGeom>
+          <a:solidFill>
+            <a:srgbClr val="9FE6FF"/>
+          </a:solidFill>
+        </p:spPr>
+        <p:txBody>
+          <a:bodyPr wrap="square">
+            <a:noAutofit/>
+          </a:bodyPr>
+          <a:lstStyle/>
+          <a:p>
+            <a:r>
+              <a:rPr lang="pt-BR" sz="2800" b="1" dirty="0">
+                <a:solidFill>
+                  <a:srgbClr val="000000"/>
+                </a:solidFill>
+                <a:latin typeface="Horley Old Style MT"/>
+                <a:ea typeface="MS Gothic" panose="020B0609070205080204" pitchFamily="49" charset="-128"/>
+                <a:cs typeface="Times New Roman" panose="02020603050405020304" pitchFamily="18" charset="0"/>
+              </a:rPr>
+              <a:t>CDF não. CFD!</a:t>
+            </a:r>
+          </a:p>
+          <a:p>
+            <a:r>
+              <a:rPr lang="pt-BR" sz="2400" b="1" dirty="0">
+                <a:solidFill>
+                  <a:srgbClr val="000000"/>
+                </a:solidFill>
+                <a:latin typeface="Horley Old Style MT"/>
+                <a:ea typeface="MS Gothic" panose="020B0609070205080204" pitchFamily="49" charset="-128"/>
+                <a:cs typeface="Times New Roman" panose="02020603050405020304" pitchFamily="18" charset="0"/>
+              </a:rPr>
+              <a:t>Recentemente resolvi dar uma guinada, “um giro de 360º” na minha carreira profissional; - Se é que você me entende (rsrs).</a:t>
+            </a:r>
+          </a:p>
+          <a:p>
+            <a:endParaRPr lang="pt-BR" sz="2400" b="1" dirty="0">
+              <a:solidFill>
+                <a:srgbClr val="000000"/>
+              </a:solidFill>
+              <a:latin typeface="Horley Old Style MT"/>
+              <a:ea typeface="MS Gothic" panose="020B0609070205080204" pitchFamily="49" charset="-128"/>
+              <a:cs typeface="Times New Roman" panose="02020603050405020304" pitchFamily="18" charset="0"/>
+            </a:endParaRPr>
+          </a:p>
+        </p:txBody>
+      </p:sp>
+      <p:pic>
+        <p:nvPicPr>
+          <p:cNvPr id="18" name="Picture 17">
+            <a:extLst>
+              <a:ext uri="{FF2B5EF4-FFF2-40B4-BE49-F238E27FC236}">
+                <a16:creationId xmlns:a16="http://schemas.microsoft.com/office/drawing/2014/main" id="{752D3EC3-460E-4882-DAC1-E89391147CBB}"/>
+              </a:ext>
+            </a:extLst>
+          </p:cNvPr>
+          <p:cNvPicPr>
+            <a:picLocks noChangeAspect="1"/>
+          </p:cNvPicPr>
+          <p:nvPr/>
+        </p:nvPicPr>
+        <p:blipFill>
+          <a:blip r:embed="rId2"/>
+          <a:stretch>
+            <a:fillRect/>
+          </a:stretch>
+        </p:blipFill>
+        <p:spPr>
+          <a:xfrm>
+            <a:off x="6527549" y="2945658"/>
+            <a:ext cx="5020670" cy="3419279"/>
+          </a:xfrm>
+          <a:prstGeom prst="rect">
+            <a:avLst/>
+          </a:prstGeom>
+        </p:spPr>
+      </p:pic>
+      <p:sp>
+        <p:nvSpPr>
+          <p:cNvPr id="7" name="TextBox 6">
+            <a:extLst>
+              <a:ext uri="{FF2B5EF4-FFF2-40B4-BE49-F238E27FC236}">
+                <a16:creationId xmlns:a16="http://schemas.microsoft.com/office/drawing/2014/main" id="{5CF3527D-79B9-AC88-1AEC-641B0332AC94}"/>
+              </a:ext>
+            </a:extLst>
+          </p:cNvPr>
+          <p:cNvSpPr txBox="1"/>
+          <p:nvPr/>
+        </p:nvSpPr>
+        <p:spPr>
+          <a:xfrm>
+            <a:off x="679009" y="1760761"/>
+            <a:ext cx="10829339" cy="1157738"/>
+          </a:xfrm>
+          <a:prstGeom prst="rect">
+            <a:avLst/>
+          </a:prstGeom>
+          <a:solidFill>
+            <a:srgbClr val="9FE6FF"/>
+          </a:solidFill>
+        </p:spPr>
+        <p:txBody>
+          <a:bodyPr wrap="square">
+            <a:noAutofit/>
+          </a:bodyPr>
+          <a:lstStyle/>
+          <a:p>
+            <a:r>
+              <a:rPr lang="pt-BR" sz="2400" b="1" dirty="0">
+                <a:solidFill>
+                  <a:srgbClr val="000000"/>
+                </a:solidFill>
+                <a:latin typeface="Horley Old Style MT"/>
+                <a:ea typeface="MS Gothic" panose="020B0609070205080204" pitchFamily="49" charset="-128"/>
+                <a:cs typeface="Times New Roman" panose="02020603050405020304" pitchFamily="18" charset="0"/>
+              </a:rPr>
+              <a:t>MODFLOW é CFD. Fluidodinâmica Computacional:</a:t>
+            </a:r>
+          </a:p>
+          <a:p>
+            <a:r>
+              <a:rPr lang="en-150" sz="1000" dirty="0"/>
+              <a:t>_______</a:t>
+            </a:r>
+            <a:endParaRPr lang="pt-BR" sz="1000" b="1" dirty="0">
+              <a:solidFill>
+                <a:srgbClr val="000000"/>
+              </a:solidFill>
+              <a:latin typeface="Horley Old Style MT"/>
+              <a:ea typeface="MS Gothic" panose="020B0609070205080204" pitchFamily="49" charset="-128"/>
+              <a:cs typeface="Times New Roman" panose="02020603050405020304" pitchFamily="18" charset="0"/>
+            </a:endParaRPr>
+          </a:p>
+          <a:p>
+            <a:r>
+              <a:rPr kumimoji="0" lang="en-US" sz="1800" b="1" i="0" u="none" strike="noStrike" kern="1200" cap="none" spc="0" normalizeH="0" baseline="0" noProof="0" dirty="0">
+                <a:ln>
+                  <a:noFill/>
+                </a:ln>
+                <a:solidFill>
+                  <a:prstClr val="black"/>
+                </a:solidFill>
+                <a:effectLst/>
+                <a:uLnTx/>
+                <a:uFillTx/>
+                <a:latin typeface="Calibri" panose="020F0502020204030204"/>
+                <a:ea typeface="+mn-ea"/>
+                <a:cs typeface="+mn-cs"/>
+              </a:rPr>
+              <a:t>[GIT Link_1]  </a:t>
+            </a:r>
+            <a:r>
+              <a:rPr lang="pt-BR" sz="1400" b="1" dirty="0">
+                <a:solidFill>
+                  <a:srgbClr val="000000"/>
+                </a:solidFill>
+                <a:latin typeface="Horley Old Style MT"/>
+                <a:ea typeface="MS Gothic" panose="020B0609070205080204" pitchFamily="49" charset="-128"/>
+                <a:cs typeface="Times New Roman" panose="02020603050405020304" pitchFamily="18" charset="0"/>
+                <a:hlinkClick r:id="rId3"/>
+              </a:rPr>
+              <a:t>https://github.com/grossiRM/CFD_ON/blob/main/04_OpenFoam/99_NOTES-on-CFD_OpenFoam.pdf</a:t>
+            </a:r>
+            <a:endParaRPr lang="pt-BR" sz="1400" b="1" dirty="0">
+              <a:solidFill>
+                <a:srgbClr val="000000"/>
+              </a:solidFill>
+              <a:latin typeface="Horley Old Style MT"/>
+              <a:ea typeface="MS Gothic" panose="020B0609070205080204" pitchFamily="49" charset="-128"/>
+              <a:cs typeface="Times New Roman" panose="02020603050405020304" pitchFamily="18" charset="0"/>
+            </a:endParaRPr>
+          </a:p>
+          <a:p>
+            <a:r>
+              <a:rPr lang="en-US" b="1" dirty="0"/>
+              <a:t>[GIT Link_2]  </a:t>
+            </a:r>
+            <a:r>
+              <a:rPr lang="pt-BR" sz="1400" b="1" dirty="0">
+                <a:solidFill>
+                  <a:srgbClr val="000000"/>
+                </a:solidFill>
+                <a:latin typeface="Horley Old Style MT"/>
+                <a:ea typeface="MS Gothic" panose="020B0609070205080204" pitchFamily="49" charset="-128"/>
+                <a:cs typeface="Times New Roman" panose="02020603050405020304" pitchFamily="18" charset="0"/>
+                <a:hlinkClick r:id="rId4"/>
+              </a:rPr>
+              <a:t>https://github.com/grossiRM/CFD_ON/blob/main/04_OpenFoam/99_NOTES-on-CFD_OpenFoam.ipynb</a:t>
+            </a:r>
+            <a:endParaRPr lang="LID4096" sz="1400" b="1" dirty="0"/>
+          </a:p>
+        </p:txBody>
+      </p:sp>
+      <p:sp>
+        <p:nvSpPr>
+          <p:cNvPr id="8" name="TextBox 7">
+            <a:extLst>
+              <a:ext uri="{FF2B5EF4-FFF2-40B4-BE49-F238E27FC236}">
+                <a16:creationId xmlns:a16="http://schemas.microsoft.com/office/drawing/2014/main" id="{BF3A508F-D643-8FE1-AAB1-23AF011E1329}"/>
+              </a:ext>
+            </a:extLst>
+          </p:cNvPr>
+          <p:cNvSpPr txBox="1"/>
+          <p:nvPr/>
+        </p:nvSpPr>
+        <p:spPr>
+          <a:xfrm>
+            <a:off x="679009" y="2986261"/>
+            <a:ext cx="5758005" cy="3338339"/>
+          </a:xfrm>
+          <a:prstGeom prst="rect">
+            <a:avLst/>
+          </a:prstGeom>
+          <a:solidFill>
+            <a:srgbClr val="9FE6FF"/>
+          </a:solidFill>
+        </p:spPr>
+        <p:txBody>
+          <a:bodyPr wrap="square">
+            <a:noAutofit/>
+          </a:bodyPr>
+          <a:lstStyle/>
+          <a:p>
+            <a:r>
+              <a:rPr lang="pt-BR" sz="2400" b="1" dirty="0">
+                <a:solidFill>
+                  <a:srgbClr val="000000"/>
+                </a:solidFill>
+                <a:latin typeface="Horley Old Style MT"/>
+                <a:ea typeface="MS Gothic" panose="020B0609070205080204" pitchFamily="49" charset="-128"/>
+                <a:cs typeface="Times New Roman" panose="02020603050405020304" pitchFamily="18" charset="0"/>
+              </a:rPr>
+              <a:t>Certo, vejamos um pouco então do que se trata o OpenFOAM, a título de curiosidade.</a:t>
+            </a:r>
+          </a:p>
+          <a:p>
+            <a:r>
+              <a:rPr lang="pt-BR" sz="2400" b="1" dirty="0">
+                <a:solidFill>
+                  <a:srgbClr val="000000"/>
+                </a:solidFill>
+                <a:latin typeface="Horley Old Style MT"/>
+                <a:ea typeface="MS Gothic" panose="020B0609070205080204" pitchFamily="49" charset="-128"/>
+                <a:cs typeface="Times New Roman" panose="02020603050405020304" pitchFamily="18" charset="0"/>
+              </a:rPr>
+              <a:t>... ainda que só sua instalação seja uma novela, a ideia (eu juro) é trabalhar num ambiente (em Python) que facilite a vida de todos. </a:t>
+            </a:r>
+          </a:p>
+          <a:p>
+            <a:r>
+              <a:rPr lang="pt-BR" sz="2400" b="1" dirty="0">
+                <a:solidFill>
+                  <a:srgbClr val="000000"/>
+                </a:solidFill>
+                <a:latin typeface="Horley Old Style MT"/>
+                <a:ea typeface="MS Gothic" panose="020B0609070205080204" pitchFamily="49" charset="-128"/>
+                <a:cs typeface="Times New Roman" panose="02020603050405020304" pitchFamily="18" charset="0"/>
+              </a:rPr>
+              <a:t>Observe aqui como fica fácil manipular qualquer fórmula matemática. </a:t>
+            </a:r>
+          </a:p>
+          <a:p>
+            <a:r>
+              <a:rPr lang="pt-BR" sz="2400" b="1" dirty="0">
+                <a:solidFill>
+                  <a:srgbClr val="000000"/>
+                </a:solidFill>
+                <a:latin typeface="Horley Old Style MT"/>
+                <a:ea typeface="MS Gothic" panose="020B0609070205080204" pitchFamily="49" charset="-128"/>
+                <a:cs typeface="Times New Roman" panose="02020603050405020304" pitchFamily="18" charset="0"/>
+              </a:rPr>
+              <a:t>Próximo capítulo: FiPy(!)</a:t>
+            </a:r>
+          </a:p>
+        </p:txBody>
+      </p:sp>
+    </p:spTree>
+    <p:extLst>
+      <p:ext uri="{BB962C8B-B14F-4D97-AF65-F5344CB8AC3E}">
+        <p14:creationId xmlns:p14="http://schemas.microsoft.com/office/powerpoint/2010/main" val="2407097395"/>
+      </p:ext>
+    </p:extLst>
+  </p:cSld>
+  <p:clrMapOvr>
+    <a:masterClrMapping/>
+  </p:clrMapOvr>
+</p:sld>
+</file>
+
+<file path=ppt/slides/slide3.xml><?xml version="1.0" encoding="utf-8"?>
+<p:sld xmlns:a="http://schemas.openxmlformats.org/drawingml/2006/main" xmlns:r="http://schemas.openxmlformats.org/officeDocument/2006/relationships" xmlns:p="http://schemas.openxmlformats.org/presentationml/2006/main">
+  <p:cSld>
+    <p:spTree>
+      <p:nvGrpSpPr>
+        <p:cNvPr id="1" name=""/>
+        <p:cNvGrpSpPr/>
+        <p:nvPr/>
+      </p:nvGrpSpPr>
+      <p:grpSpPr>
+        <a:xfrm>
+          <a:off x="0" y="0"/>
+          <a:ext cx="0" cy="0"/>
+          <a:chOff x="0" y="0"/>
+          <a:chExt cx="0" cy="0"/>
+        </a:xfrm>
+      </p:grpSpPr>
       <p:pic>
         <p:nvPicPr>
           <p:cNvPr id="5" name="Picture 4">
@@ -5553,6 +5900,74 @@
           </a:prstGeom>
         </p:spPr>
       </p:pic>
+      <p:sp>
+        <p:nvSpPr>
+          <p:cNvPr id="3" name="TextBox 2">
+            <a:extLst>
+              <a:ext uri="{FF2B5EF4-FFF2-40B4-BE49-F238E27FC236}">
+                <a16:creationId xmlns:a16="http://schemas.microsoft.com/office/drawing/2014/main" id="{5E78686A-30C8-7DCF-6B01-6CB95AD5F730}"/>
+              </a:ext>
+            </a:extLst>
+          </p:cNvPr>
+          <p:cNvSpPr txBox="1"/>
+          <p:nvPr/>
+        </p:nvSpPr>
+        <p:spPr>
+          <a:xfrm>
+            <a:off x="829523" y="4610099"/>
+            <a:ext cx="10667151" cy="2031325"/>
+          </a:xfrm>
+          <a:prstGeom prst="rect">
+            <a:avLst/>
+          </a:prstGeom>
+          <a:noFill/>
+        </p:spPr>
+        <p:txBody>
+          <a:bodyPr wrap="square">
+            <a:spAutoFit/>
+          </a:bodyPr>
+          <a:lstStyle/>
+          <a:p>
+            <a:r>
+              <a:rPr lang="pt-BR" b="1" dirty="0"/>
+              <a:t>Resolvi dar uma guinada, “um giro de 360º” nos meus objetivos, se é que você me entende. </a:t>
+            </a:r>
+            <a:endParaRPr lang="pt-BR" dirty="0"/>
+          </a:p>
+          <a:p>
+            <a:r>
+              <a:rPr lang="pt-BR" dirty="0"/>
+              <a:t>Como MODFLOW é CFD, vejamos o que se entende, via OpenFOAM, por Fluidodinâmica Computacional. </a:t>
+            </a:r>
+          </a:p>
+          <a:p>
+            <a:r>
+              <a:rPr lang="pt-BR" b="1" dirty="0"/>
+              <a:t>Mas antes da novela da instalação, observe aqui um exemplo de como fica fácil manipular qualquer fórmula matemática neste novo ambiente.</a:t>
+            </a:r>
+            <a:endParaRPr lang="pt-BR" dirty="0"/>
+          </a:p>
+          <a:p>
+            <a:r>
+              <a:rPr lang="pt-BR" b="1" dirty="0"/>
+              <a:t>﻿Próximo capítulo: FiPy! </a:t>
+            </a:r>
+            <a:endParaRPr lang="pt-BR" dirty="0"/>
+          </a:p>
+          <a:p>
+            <a:r>
+              <a:rPr lang="pt-BR" dirty="0"/>
+              <a:t>https://github.com/grossiRM/CFD_ON/blob/main/04_OpenFoam/99_NOTES-on-CFD_OpenFoam.ipynb </a:t>
+            </a:r>
+          </a:p>
+          <a:p>
+            <a:r>
+              <a:rPr lang="pt-BR" dirty="0"/>
+              <a:t>CDF não. CFD! 😜</a:t>
+            </a:r>
+          </a:p>
+        </p:txBody>
+      </p:sp>
     </p:spTree>
     <p:extLst>
       <p:ext uri="{BB962C8B-B14F-4D97-AF65-F5344CB8AC3E}">
